--- a/Final Project_HabitForge_Presentation.pptx
+++ b/Final Project_HabitForge_Presentation.pptx
@@ -5,22 +5,27 @@
     <p:sldMasterId id="2147483659" r:id="rId1"/>
   </p:sldMasterIdLst>
   <p:notesMasterIdLst>
-    <p:notesMasterId r:id="rId15"/>
+    <p:notesMasterId r:id="rId20"/>
   </p:notesMasterIdLst>
   <p:sldIdLst>
     <p:sldId id="256" r:id="rId2"/>
     <p:sldId id="257" r:id="rId3"/>
-    <p:sldId id="258" r:id="rId4"/>
-    <p:sldId id="265" r:id="rId5"/>
-    <p:sldId id="266" r:id="rId6"/>
-    <p:sldId id="267" r:id="rId7"/>
-    <p:sldId id="268" r:id="rId8"/>
-    <p:sldId id="259" r:id="rId9"/>
-    <p:sldId id="264" r:id="rId10"/>
-    <p:sldId id="260" r:id="rId11"/>
-    <p:sldId id="261" r:id="rId12"/>
-    <p:sldId id="262" r:id="rId13"/>
-    <p:sldId id="263" r:id="rId14"/>
+    <p:sldId id="269" r:id="rId4"/>
+    <p:sldId id="270" r:id="rId5"/>
+    <p:sldId id="271" r:id="rId6"/>
+    <p:sldId id="272" r:id="rId7"/>
+    <p:sldId id="273" r:id="rId8"/>
+    <p:sldId id="258" r:id="rId9"/>
+    <p:sldId id="265" r:id="rId10"/>
+    <p:sldId id="266" r:id="rId11"/>
+    <p:sldId id="267" r:id="rId12"/>
+    <p:sldId id="268" r:id="rId13"/>
+    <p:sldId id="259" r:id="rId14"/>
+    <p:sldId id="264" r:id="rId15"/>
+    <p:sldId id="260" r:id="rId16"/>
+    <p:sldId id="261" r:id="rId17"/>
+    <p:sldId id="262" r:id="rId18"/>
+    <p:sldId id="263" r:id="rId19"/>
   </p:sldIdLst>
   <p:sldSz cx="9144000" cy="5143500" type="screen16x9"/>
   <p:notesSz cx="6858000" cy="9144000"/>
@@ -811,6 +816,618 @@
   <p:cSld>
     <p:spTree>
       <p:nvGrpSpPr>
+        <p:cNvPr id="1" name="Shape 64">
+          <a:extLst>
+            <a:ext uri="{FF2B5EF4-FFF2-40B4-BE49-F238E27FC236}">
+              <a16:creationId xmlns:a16="http://schemas.microsoft.com/office/drawing/2014/main" id="{FFF1861E-9CBA-247E-2A25-892CC1F8CDF4}"/>
+            </a:ext>
+          </a:extLst>
+        </p:cNvPr>
+        <p:cNvGrpSpPr/>
+        <p:nvPr/>
+      </p:nvGrpSpPr>
+      <p:grpSpPr>
+        <a:xfrm>
+          <a:off x="0" y="0"/>
+          <a:ext cx="0" cy="0"/>
+          <a:chOff x="0" y="0"/>
+          <a:chExt cx="0" cy="0"/>
+        </a:xfrm>
+      </p:grpSpPr>
+      <p:sp>
+        <p:nvSpPr>
+          <p:cNvPr id="65" name="Google Shape;65;g2824b25c245_0_0:notes">
+            <a:extLst>
+              <a:ext uri="{FF2B5EF4-FFF2-40B4-BE49-F238E27FC236}">
+                <a16:creationId xmlns:a16="http://schemas.microsoft.com/office/drawing/2014/main" id="{C89C5658-25D0-EFD0-EDC3-57802B842563}"/>
+              </a:ext>
+            </a:extLst>
+          </p:cNvPr>
+          <p:cNvSpPr>
+            <a:spLocks noGrp="1" noRot="1" noChangeAspect="1"/>
+          </p:cNvSpPr>
+          <p:nvPr>
+            <p:ph type="sldImg" idx="2"/>
+          </p:nvPr>
+        </p:nvSpPr>
+        <p:spPr>
+          <a:xfrm>
+            <a:off x="381000" y="685800"/>
+            <a:ext cx="6096000" cy="3429000"/>
+          </a:xfrm>
+          <a:custGeom>
+            <a:avLst/>
+            <a:gdLst/>
+            <a:ahLst/>
+            <a:cxnLst/>
+            <a:rect l="l" t="t" r="r" b="b"/>
+            <a:pathLst>
+              <a:path w="120000" h="120000" extrusionOk="0">
+                <a:moveTo>
+                  <a:pt x="0" y="0"/>
+                </a:moveTo>
+                <a:lnTo>
+                  <a:pt x="120000" y="0"/>
+                </a:lnTo>
+                <a:lnTo>
+                  <a:pt x="120000" y="120000"/>
+                </a:lnTo>
+                <a:lnTo>
+                  <a:pt x="0" y="120000"/>
+                </a:lnTo>
+                <a:close/>
+              </a:path>
+            </a:pathLst>
+          </a:custGeom>
+        </p:spPr>
+      </p:sp>
+      <p:sp>
+        <p:nvSpPr>
+          <p:cNvPr id="66" name="Google Shape;66;g2824b25c245_0_0:notes">
+            <a:extLst>
+              <a:ext uri="{FF2B5EF4-FFF2-40B4-BE49-F238E27FC236}">
+                <a16:creationId xmlns:a16="http://schemas.microsoft.com/office/drawing/2014/main" id="{6E52B0FF-9A1F-5789-6DAA-2531250B4E25}"/>
+              </a:ext>
+            </a:extLst>
+          </p:cNvPr>
+          <p:cNvSpPr txBox="1">
+            <a:spLocks noGrp="1"/>
+          </p:cNvSpPr>
+          <p:nvPr>
+            <p:ph type="body" idx="1"/>
+          </p:nvPr>
+        </p:nvSpPr>
+        <p:spPr>
+          <a:xfrm>
+            <a:off x="685800" y="4343400"/>
+            <a:ext cx="5486400" cy="4114800"/>
+          </a:xfrm>
+          <a:prstGeom prst="rect">
+            <a:avLst/>
+          </a:prstGeom>
+        </p:spPr>
+        <p:txBody>
+          <a:bodyPr spcFirstLastPara="1" wrap="square" lIns="91425" tIns="91425" rIns="91425" bIns="91425" anchor="t" anchorCtr="0">
+            <a:noAutofit/>
+          </a:bodyPr>
+          <a:lstStyle/>
+          <a:p>
+            <a:pPr marL="0" lvl="0" indent="0" algn="l" rtl="0">
+              <a:spcBef>
+                <a:spcPts val="0"/>
+              </a:spcBef>
+              <a:spcAft>
+                <a:spcPts val="0"/>
+              </a:spcAft>
+              <a:buNone/>
+            </a:pPr>
+            <a:endParaRPr/>
+          </a:p>
+        </p:txBody>
+      </p:sp>
+    </p:spTree>
+    <p:extLst>
+      <p:ext uri="{BB962C8B-B14F-4D97-AF65-F5344CB8AC3E}">
+        <p14:creationId xmlns:p14="http://schemas.microsoft.com/office/powerpoint/2010/main" val="387291815"/>
+      </p:ext>
+    </p:extLst>
+  </p:cSld>
+  <p:clrMapOvr>
+    <a:masterClrMapping/>
+  </p:clrMapOvr>
+</p:notes>
+</file>
+
+<file path=ppt/notesSlides/notesSlide11.xml><?xml version="1.0" encoding="utf-8"?>
+<p:notes xmlns:a="http://schemas.openxmlformats.org/drawingml/2006/main" xmlns:r="http://schemas.openxmlformats.org/officeDocument/2006/relationships" xmlns:p="http://schemas.openxmlformats.org/presentationml/2006/main" showMasterSp="0" showMasterPhAnim="0">
+  <p:cSld>
+    <p:spTree>
+      <p:nvGrpSpPr>
+        <p:cNvPr id="1" name="Shape 64">
+          <a:extLst>
+            <a:ext uri="{FF2B5EF4-FFF2-40B4-BE49-F238E27FC236}">
+              <a16:creationId xmlns:a16="http://schemas.microsoft.com/office/drawing/2014/main" id="{D6172B3C-1CA5-C295-7A5C-A1F251A33CF4}"/>
+            </a:ext>
+          </a:extLst>
+        </p:cNvPr>
+        <p:cNvGrpSpPr/>
+        <p:nvPr/>
+      </p:nvGrpSpPr>
+      <p:grpSpPr>
+        <a:xfrm>
+          <a:off x="0" y="0"/>
+          <a:ext cx="0" cy="0"/>
+          <a:chOff x="0" y="0"/>
+          <a:chExt cx="0" cy="0"/>
+        </a:xfrm>
+      </p:grpSpPr>
+      <p:sp>
+        <p:nvSpPr>
+          <p:cNvPr id="65" name="Google Shape;65;g2824b25c245_0_0:notes">
+            <a:extLst>
+              <a:ext uri="{FF2B5EF4-FFF2-40B4-BE49-F238E27FC236}">
+                <a16:creationId xmlns:a16="http://schemas.microsoft.com/office/drawing/2014/main" id="{ACB66052-444C-A72F-7220-1172E8F23EB3}"/>
+              </a:ext>
+            </a:extLst>
+          </p:cNvPr>
+          <p:cNvSpPr>
+            <a:spLocks noGrp="1" noRot="1" noChangeAspect="1"/>
+          </p:cNvSpPr>
+          <p:nvPr>
+            <p:ph type="sldImg" idx="2"/>
+          </p:nvPr>
+        </p:nvSpPr>
+        <p:spPr>
+          <a:xfrm>
+            <a:off x="381000" y="685800"/>
+            <a:ext cx="6096000" cy="3429000"/>
+          </a:xfrm>
+          <a:custGeom>
+            <a:avLst/>
+            <a:gdLst/>
+            <a:ahLst/>
+            <a:cxnLst/>
+            <a:rect l="l" t="t" r="r" b="b"/>
+            <a:pathLst>
+              <a:path w="120000" h="120000" extrusionOk="0">
+                <a:moveTo>
+                  <a:pt x="0" y="0"/>
+                </a:moveTo>
+                <a:lnTo>
+                  <a:pt x="120000" y="0"/>
+                </a:lnTo>
+                <a:lnTo>
+                  <a:pt x="120000" y="120000"/>
+                </a:lnTo>
+                <a:lnTo>
+                  <a:pt x="0" y="120000"/>
+                </a:lnTo>
+                <a:close/>
+              </a:path>
+            </a:pathLst>
+          </a:custGeom>
+        </p:spPr>
+      </p:sp>
+      <p:sp>
+        <p:nvSpPr>
+          <p:cNvPr id="66" name="Google Shape;66;g2824b25c245_0_0:notes">
+            <a:extLst>
+              <a:ext uri="{FF2B5EF4-FFF2-40B4-BE49-F238E27FC236}">
+                <a16:creationId xmlns:a16="http://schemas.microsoft.com/office/drawing/2014/main" id="{DC20A055-825E-2BBE-843A-812600E30758}"/>
+              </a:ext>
+            </a:extLst>
+          </p:cNvPr>
+          <p:cNvSpPr txBox="1">
+            <a:spLocks noGrp="1"/>
+          </p:cNvSpPr>
+          <p:nvPr>
+            <p:ph type="body" idx="1"/>
+          </p:nvPr>
+        </p:nvSpPr>
+        <p:spPr>
+          <a:xfrm>
+            <a:off x="685800" y="4343400"/>
+            <a:ext cx="5486400" cy="4114800"/>
+          </a:xfrm>
+          <a:prstGeom prst="rect">
+            <a:avLst/>
+          </a:prstGeom>
+        </p:spPr>
+        <p:txBody>
+          <a:bodyPr spcFirstLastPara="1" wrap="square" lIns="91425" tIns="91425" rIns="91425" bIns="91425" anchor="t" anchorCtr="0">
+            <a:noAutofit/>
+          </a:bodyPr>
+          <a:lstStyle/>
+          <a:p>
+            <a:pPr marL="0" lvl="0" indent="0" algn="l" rtl="0">
+              <a:spcBef>
+                <a:spcPts val="0"/>
+              </a:spcBef>
+              <a:spcAft>
+                <a:spcPts val="0"/>
+              </a:spcAft>
+              <a:buNone/>
+            </a:pPr>
+            <a:endParaRPr/>
+          </a:p>
+        </p:txBody>
+      </p:sp>
+    </p:spTree>
+    <p:extLst>
+      <p:ext uri="{BB962C8B-B14F-4D97-AF65-F5344CB8AC3E}">
+        <p14:creationId xmlns:p14="http://schemas.microsoft.com/office/powerpoint/2010/main" val="965162364"/>
+      </p:ext>
+    </p:extLst>
+  </p:cSld>
+  <p:clrMapOvr>
+    <a:masterClrMapping/>
+  </p:clrMapOvr>
+</p:notes>
+</file>
+
+<file path=ppt/notesSlides/notesSlide12.xml><?xml version="1.0" encoding="utf-8"?>
+<p:notes xmlns:a="http://schemas.openxmlformats.org/drawingml/2006/main" xmlns:r="http://schemas.openxmlformats.org/officeDocument/2006/relationships" xmlns:p="http://schemas.openxmlformats.org/presentationml/2006/main" showMasterSp="0" showMasterPhAnim="0">
+  <p:cSld>
+    <p:spTree>
+      <p:nvGrpSpPr>
+        <p:cNvPr id="1" name="Shape 64">
+          <a:extLst>
+            <a:ext uri="{FF2B5EF4-FFF2-40B4-BE49-F238E27FC236}">
+              <a16:creationId xmlns:a16="http://schemas.microsoft.com/office/drawing/2014/main" id="{FBABF2A7-8CB1-575D-88FF-04BEE615314E}"/>
+            </a:ext>
+          </a:extLst>
+        </p:cNvPr>
+        <p:cNvGrpSpPr/>
+        <p:nvPr/>
+      </p:nvGrpSpPr>
+      <p:grpSpPr>
+        <a:xfrm>
+          <a:off x="0" y="0"/>
+          <a:ext cx="0" cy="0"/>
+          <a:chOff x="0" y="0"/>
+          <a:chExt cx="0" cy="0"/>
+        </a:xfrm>
+      </p:grpSpPr>
+      <p:sp>
+        <p:nvSpPr>
+          <p:cNvPr id="65" name="Google Shape;65;g2824b25c245_0_0:notes">
+            <a:extLst>
+              <a:ext uri="{FF2B5EF4-FFF2-40B4-BE49-F238E27FC236}">
+                <a16:creationId xmlns:a16="http://schemas.microsoft.com/office/drawing/2014/main" id="{191E0886-EE7E-D759-CAC5-A0C554B8F663}"/>
+              </a:ext>
+            </a:extLst>
+          </p:cNvPr>
+          <p:cNvSpPr>
+            <a:spLocks noGrp="1" noRot="1" noChangeAspect="1"/>
+          </p:cNvSpPr>
+          <p:nvPr>
+            <p:ph type="sldImg" idx="2"/>
+          </p:nvPr>
+        </p:nvSpPr>
+        <p:spPr>
+          <a:xfrm>
+            <a:off x="381000" y="685800"/>
+            <a:ext cx="6096000" cy="3429000"/>
+          </a:xfrm>
+          <a:custGeom>
+            <a:avLst/>
+            <a:gdLst/>
+            <a:ahLst/>
+            <a:cxnLst/>
+            <a:rect l="l" t="t" r="r" b="b"/>
+            <a:pathLst>
+              <a:path w="120000" h="120000" extrusionOk="0">
+                <a:moveTo>
+                  <a:pt x="0" y="0"/>
+                </a:moveTo>
+                <a:lnTo>
+                  <a:pt x="120000" y="0"/>
+                </a:lnTo>
+                <a:lnTo>
+                  <a:pt x="120000" y="120000"/>
+                </a:lnTo>
+                <a:lnTo>
+                  <a:pt x="0" y="120000"/>
+                </a:lnTo>
+                <a:close/>
+              </a:path>
+            </a:pathLst>
+          </a:custGeom>
+        </p:spPr>
+      </p:sp>
+      <p:sp>
+        <p:nvSpPr>
+          <p:cNvPr id="66" name="Google Shape;66;g2824b25c245_0_0:notes">
+            <a:extLst>
+              <a:ext uri="{FF2B5EF4-FFF2-40B4-BE49-F238E27FC236}">
+                <a16:creationId xmlns:a16="http://schemas.microsoft.com/office/drawing/2014/main" id="{FD8A55B7-9A95-F73C-7BE3-02C7A334A5D1}"/>
+              </a:ext>
+            </a:extLst>
+          </p:cNvPr>
+          <p:cNvSpPr txBox="1">
+            <a:spLocks noGrp="1"/>
+          </p:cNvSpPr>
+          <p:nvPr>
+            <p:ph type="body" idx="1"/>
+          </p:nvPr>
+        </p:nvSpPr>
+        <p:spPr>
+          <a:xfrm>
+            <a:off x="685800" y="4343400"/>
+            <a:ext cx="5486400" cy="4114800"/>
+          </a:xfrm>
+          <a:prstGeom prst="rect">
+            <a:avLst/>
+          </a:prstGeom>
+        </p:spPr>
+        <p:txBody>
+          <a:bodyPr spcFirstLastPara="1" wrap="square" lIns="91425" tIns="91425" rIns="91425" bIns="91425" anchor="t" anchorCtr="0">
+            <a:noAutofit/>
+          </a:bodyPr>
+          <a:lstStyle/>
+          <a:p>
+            <a:pPr marL="0" lvl="0" indent="0" algn="l" rtl="0">
+              <a:spcBef>
+                <a:spcPts val="0"/>
+              </a:spcBef>
+              <a:spcAft>
+                <a:spcPts val="0"/>
+              </a:spcAft>
+              <a:buNone/>
+            </a:pPr>
+            <a:endParaRPr/>
+          </a:p>
+        </p:txBody>
+      </p:sp>
+    </p:spTree>
+    <p:extLst>
+      <p:ext uri="{BB962C8B-B14F-4D97-AF65-F5344CB8AC3E}">
+        <p14:creationId xmlns:p14="http://schemas.microsoft.com/office/powerpoint/2010/main" val="1679186901"/>
+      </p:ext>
+    </p:extLst>
+  </p:cSld>
+  <p:clrMapOvr>
+    <a:masterClrMapping/>
+  </p:clrMapOvr>
+</p:notes>
+</file>
+
+<file path=ppt/notesSlides/notesSlide13.xml><?xml version="1.0" encoding="utf-8"?>
+<p:notes xmlns:a="http://schemas.openxmlformats.org/drawingml/2006/main" xmlns:r="http://schemas.openxmlformats.org/officeDocument/2006/relationships" xmlns:p="http://schemas.openxmlformats.org/presentationml/2006/main" showMasterSp="0" showMasterPhAnim="0">
+  <p:cSld>
+    <p:spTree>
+      <p:nvGrpSpPr>
+        <p:cNvPr id="1" name="Shape 69"/>
+        <p:cNvGrpSpPr/>
+        <p:nvPr/>
+      </p:nvGrpSpPr>
+      <p:grpSpPr>
+        <a:xfrm>
+          <a:off x="0" y="0"/>
+          <a:ext cx="0" cy="0"/>
+          <a:chOff x="0" y="0"/>
+          <a:chExt cx="0" cy="0"/>
+        </a:xfrm>
+      </p:grpSpPr>
+      <p:sp>
+        <p:nvSpPr>
+          <p:cNvPr id="70" name="Google Shape;70;g4df5837ef2_0_5:notes"/>
+          <p:cNvSpPr>
+            <a:spLocks noGrp="1" noRot="1" noChangeAspect="1"/>
+          </p:cNvSpPr>
+          <p:nvPr>
+            <p:ph type="sldImg" idx="2"/>
+          </p:nvPr>
+        </p:nvSpPr>
+        <p:spPr>
+          <a:xfrm>
+            <a:off x="381000" y="685800"/>
+            <a:ext cx="6096000" cy="3429000"/>
+          </a:xfrm>
+          <a:custGeom>
+            <a:avLst/>
+            <a:gdLst/>
+            <a:ahLst/>
+            <a:cxnLst/>
+            <a:rect l="l" t="t" r="r" b="b"/>
+            <a:pathLst>
+              <a:path w="120000" h="120000" extrusionOk="0">
+                <a:moveTo>
+                  <a:pt x="0" y="0"/>
+                </a:moveTo>
+                <a:lnTo>
+                  <a:pt x="120000" y="0"/>
+                </a:lnTo>
+                <a:lnTo>
+                  <a:pt x="120000" y="120000"/>
+                </a:lnTo>
+                <a:lnTo>
+                  <a:pt x="0" y="120000"/>
+                </a:lnTo>
+                <a:close/>
+              </a:path>
+            </a:pathLst>
+          </a:custGeom>
+        </p:spPr>
+      </p:sp>
+      <p:sp>
+        <p:nvSpPr>
+          <p:cNvPr id="71" name="Google Shape;71;g4df5837ef2_0_5:notes"/>
+          <p:cNvSpPr txBox="1">
+            <a:spLocks noGrp="1"/>
+          </p:cNvSpPr>
+          <p:nvPr>
+            <p:ph type="body" idx="1"/>
+          </p:nvPr>
+        </p:nvSpPr>
+        <p:spPr>
+          <a:xfrm>
+            <a:off x="685800" y="4343400"/>
+            <a:ext cx="5486400" cy="4114800"/>
+          </a:xfrm>
+          <a:prstGeom prst="rect">
+            <a:avLst/>
+          </a:prstGeom>
+        </p:spPr>
+        <p:txBody>
+          <a:bodyPr spcFirstLastPara="1" wrap="square" lIns="91425" tIns="91425" rIns="91425" bIns="91425" anchor="t" anchorCtr="0">
+            <a:noAutofit/>
+          </a:bodyPr>
+          <a:lstStyle/>
+          <a:p>
+            <a:pPr marL="0" lvl="0" indent="0" algn="l" rtl="0">
+              <a:spcBef>
+                <a:spcPts val="0"/>
+              </a:spcBef>
+              <a:spcAft>
+                <a:spcPts val="0"/>
+              </a:spcAft>
+              <a:buNone/>
+            </a:pPr>
+            <a:endParaRPr/>
+          </a:p>
+        </p:txBody>
+      </p:sp>
+    </p:spTree>
+  </p:cSld>
+  <p:clrMapOvr>
+    <a:masterClrMapping/>
+  </p:clrMapOvr>
+</p:notes>
+</file>
+
+<file path=ppt/notesSlides/notesSlide14.xml><?xml version="1.0" encoding="utf-8"?>
+<p:notes xmlns:a="http://schemas.openxmlformats.org/drawingml/2006/main" xmlns:r="http://schemas.openxmlformats.org/officeDocument/2006/relationships" xmlns:p="http://schemas.openxmlformats.org/presentationml/2006/main" showMasterSp="0" showMasterPhAnim="0">
+  <p:cSld>
+    <p:spTree>
+      <p:nvGrpSpPr>
+        <p:cNvPr id="1" name="Shape 69">
+          <a:extLst>
+            <a:ext uri="{FF2B5EF4-FFF2-40B4-BE49-F238E27FC236}">
+              <a16:creationId xmlns:a16="http://schemas.microsoft.com/office/drawing/2014/main" id="{7F2D1602-9942-F704-E77A-0426C4A91153}"/>
+            </a:ext>
+          </a:extLst>
+        </p:cNvPr>
+        <p:cNvGrpSpPr/>
+        <p:nvPr/>
+      </p:nvGrpSpPr>
+      <p:grpSpPr>
+        <a:xfrm>
+          <a:off x="0" y="0"/>
+          <a:ext cx="0" cy="0"/>
+          <a:chOff x="0" y="0"/>
+          <a:chExt cx="0" cy="0"/>
+        </a:xfrm>
+      </p:grpSpPr>
+      <p:sp>
+        <p:nvSpPr>
+          <p:cNvPr id="70" name="Google Shape;70;g4df5837ef2_0_5:notes">
+            <a:extLst>
+              <a:ext uri="{FF2B5EF4-FFF2-40B4-BE49-F238E27FC236}">
+                <a16:creationId xmlns:a16="http://schemas.microsoft.com/office/drawing/2014/main" id="{238033AF-B8DA-E33C-C80B-45F81AF9B0FE}"/>
+              </a:ext>
+            </a:extLst>
+          </p:cNvPr>
+          <p:cNvSpPr>
+            <a:spLocks noGrp="1" noRot="1" noChangeAspect="1"/>
+          </p:cNvSpPr>
+          <p:nvPr>
+            <p:ph type="sldImg" idx="2"/>
+          </p:nvPr>
+        </p:nvSpPr>
+        <p:spPr>
+          <a:xfrm>
+            <a:off x="381000" y="685800"/>
+            <a:ext cx="6096000" cy="3429000"/>
+          </a:xfrm>
+          <a:custGeom>
+            <a:avLst/>
+            <a:gdLst/>
+            <a:ahLst/>
+            <a:cxnLst/>
+            <a:rect l="l" t="t" r="r" b="b"/>
+            <a:pathLst>
+              <a:path w="120000" h="120000" extrusionOk="0">
+                <a:moveTo>
+                  <a:pt x="0" y="0"/>
+                </a:moveTo>
+                <a:lnTo>
+                  <a:pt x="120000" y="0"/>
+                </a:lnTo>
+                <a:lnTo>
+                  <a:pt x="120000" y="120000"/>
+                </a:lnTo>
+                <a:lnTo>
+                  <a:pt x="0" y="120000"/>
+                </a:lnTo>
+                <a:close/>
+              </a:path>
+            </a:pathLst>
+          </a:custGeom>
+        </p:spPr>
+      </p:sp>
+      <p:sp>
+        <p:nvSpPr>
+          <p:cNvPr id="71" name="Google Shape;71;g4df5837ef2_0_5:notes">
+            <a:extLst>
+              <a:ext uri="{FF2B5EF4-FFF2-40B4-BE49-F238E27FC236}">
+                <a16:creationId xmlns:a16="http://schemas.microsoft.com/office/drawing/2014/main" id="{906A643E-A51B-046F-BDAC-261D63AF9413}"/>
+              </a:ext>
+            </a:extLst>
+          </p:cNvPr>
+          <p:cNvSpPr txBox="1">
+            <a:spLocks noGrp="1"/>
+          </p:cNvSpPr>
+          <p:nvPr>
+            <p:ph type="body" idx="1"/>
+          </p:nvPr>
+        </p:nvSpPr>
+        <p:spPr>
+          <a:xfrm>
+            <a:off x="685800" y="4343400"/>
+            <a:ext cx="5486400" cy="4114800"/>
+          </a:xfrm>
+          <a:prstGeom prst="rect">
+            <a:avLst/>
+          </a:prstGeom>
+        </p:spPr>
+        <p:txBody>
+          <a:bodyPr spcFirstLastPara="1" wrap="square" lIns="91425" tIns="91425" rIns="91425" bIns="91425" anchor="t" anchorCtr="0">
+            <a:noAutofit/>
+          </a:bodyPr>
+          <a:lstStyle/>
+          <a:p>
+            <a:pPr marL="0" lvl="0" indent="0" algn="l" rtl="0">
+              <a:spcBef>
+                <a:spcPts val="0"/>
+              </a:spcBef>
+              <a:spcAft>
+                <a:spcPts val="0"/>
+              </a:spcAft>
+              <a:buNone/>
+            </a:pPr>
+            <a:endParaRPr/>
+          </a:p>
+        </p:txBody>
+      </p:sp>
+    </p:spTree>
+    <p:extLst>
+      <p:ext uri="{BB962C8B-B14F-4D97-AF65-F5344CB8AC3E}">
+        <p14:creationId xmlns:p14="http://schemas.microsoft.com/office/powerpoint/2010/main" val="4196729049"/>
+      </p:ext>
+    </p:extLst>
+  </p:cSld>
+  <p:clrMapOvr>
+    <a:masterClrMapping/>
+  </p:clrMapOvr>
+</p:notes>
+</file>
+
+<file path=ppt/notesSlides/notesSlide15.xml><?xml version="1.0" encoding="utf-8"?>
+<p:notes xmlns:a="http://schemas.openxmlformats.org/drawingml/2006/main" xmlns:r="http://schemas.openxmlformats.org/officeDocument/2006/relationships" xmlns:p="http://schemas.openxmlformats.org/presentationml/2006/main" showMasterSp="0" showMasterPhAnim="0">
+  <p:cSld>
+    <p:spTree>
+      <p:nvGrpSpPr>
         <p:cNvPr id="1" name="Shape 75"/>
         <p:cNvGrpSpPr/>
         <p:nvPr/>
@@ -910,7 +1527,7 @@
 </p:notes>
 </file>
 
-<file path=ppt/notesSlides/notesSlide11.xml><?xml version="1.0" encoding="utf-8"?>
+<file path=ppt/notesSlides/notesSlide16.xml><?xml version="1.0" encoding="utf-8"?>
 <p:notes xmlns:a="http://schemas.openxmlformats.org/drawingml/2006/main" xmlns:r="http://schemas.openxmlformats.org/officeDocument/2006/relationships" xmlns:p="http://schemas.openxmlformats.org/presentationml/2006/main" showMasterSp="0" showMasterPhAnim="0">
   <p:cSld>
     <p:spTree>
@@ -1014,7 +1631,7 @@
 </p:notes>
 </file>
 
-<file path=ppt/notesSlides/notesSlide12.xml><?xml version="1.0" encoding="utf-8"?>
+<file path=ppt/notesSlides/notesSlide17.xml><?xml version="1.0" encoding="utf-8"?>
 <p:notes xmlns:a="http://schemas.openxmlformats.org/drawingml/2006/main" xmlns:r="http://schemas.openxmlformats.org/officeDocument/2006/relationships" xmlns:p="http://schemas.openxmlformats.org/presentationml/2006/main" showMasterSp="0" showMasterPhAnim="0">
   <p:cSld>
     <p:spTree>
@@ -1118,7 +1735,7 @@
 </p:notes>
 </file>
 
-<file path=ppt/notesSlides/notesSlide13.xml><?xml version="1.0" encoding="utf-8"?>
+<file path=ppt/notesSlides/notesSlide18.xml><?xml version="1.0" encoding="utf-8"?>
 <p:notes xmlns:a="http://schemas.openxmlformats.org/drawingml/2006/main" xmlns:r="http://schemas.openxmlformats.org/officeDocument/2006/relationships" xmlns:p="http://schemas.openxmlformats.org/presentationml/2006/main" showMasterSp="0" showMasterPhAnim="0">
   <p:cSld>
     <p:spTree>
@@ -1331,6 +1948,641 @@
   <p:cSld>
     <p:spTree>
       <p:nvGrpSpPr>
+        <p:cNvPr id="1" name="Shape 58">
+          <a:extLst>
+            <a:ext uri="{FF2B5EF4-FFF2-40B4-BE49-F238E27FC236}">
+              <a16:creationId xmlns:a16="http://schemas.microsoft.com/office/drawing/2014/main" id="{37D189B7-D1B0-0267-847F-8171F4CA012C}"/>
+            </a:ext>
+          </a:extLst>
+        </p:cNvPr>
+        <p:cNvGrpSpPr/>
+        <p:nvPr/>
+      </p:nvGrpSpPr>
+      <p:grpSpPr>
+        <a:xfrm>
+          <a:off x="0" y="0"/>
+          <a:ext cx="0" cy="0"/>
+          <a:chOff x="0" y="0"/>
+          <a:chExt cx="0" cy="0"/>
+        </a:xfrm>
+      </p:grpSpPr>
+      <p:sp>
+        <p:nvSpPr>
+          <p:cNvPr id="59" name="Google Shape;59;g4df5837ef2_0_0:notes">
+            <a:extLst>
+              <a:ext uri="{FF2B5EF4-FFF2-40B4-BE49-F238E27FC236}">
+                <a16:creationId xmlns:a16="http://schemas.microsoft.com/office/drawing/2014/main" id="{10086B71-C026-E9F3-3E56-B7DB75CFBA01}"/>
+              </a:ext>
+            </a:extLst>
+          </p:cNvPr>
+          <p:cNvSpPr>
+            <a:spLocks noGrp="1" noRot="1" noChangeAspect="1"/>
+          </p:cNvSpPr>
+          <p:nvPr>
+            <p:ph type="sldImg" idx="2"/>
+          </p:nvPr>
+        </p:nvSpPr>
+        <p:spPr>
+          <a:xfrm>
+            <a:off x="381000" y="685800"/>
+            <a:ext cx="6096000" cy="3429000"/>
+          </a:xfrm>
+          <a:custGeom>
+            <a:avLst/>
+            <a:gdLst/>
+            <a:ahLst/>
+            <a:cxnLst/>
+            <a:rect l="l" t="t" r="r" b="b"/>
+            <a:pathLst>
+              <a:path w="120000" h="120000" extrusionOk="0">
+                <a:moveTo>
+                  <a:pt x="0" y="0"/>
+                </a:moveTo>
+                <a:lnTo>
+                  <a:pt x="120000" y="0"/>
+                </a:lnTo>
+                <a:lnTo>
+                  <a:pt x="120000" y="120000"/>
+                </a:lnTo>
+                <a:lnTo>
+                  <a:pt x="0" y="120000"/>
+                </a:lnTo>
+                <a:close/>
+              </a:path>
+            </a:pathLst>
+          </a:custGeom>
+        </p:spPr>
+      </p:sp>
+      <p:sp>
+        <p:nvSpPr>
+          <p:cNvPr id="60" name="Google Shape;60;g4df5837ef2_0_0:notes">
+            <a:extLst>
+              <a:ext uri="{FF2B5EF4-FFF2-40B4-BE49-F238E27FC236}">
+                <a16:creationId xmlns:a16="http://schemas.microsoft.com/office/drawing/2014/main" id="{D04270F1-47FF-3BD5-8E0E-E6F3C25A0C12}"/>
+              </a:ext>
+            </a:extLst>
+          </p:cNvPr>
+          <p:cNvSpPr txBox="1">
+            <a:spLocks noGrp="1"/>
+          </p:cNvSpPr>
+          <p:nvPr>
+            <p:ph type="body" idx="1"/>
+          </p:nvPr>
+        </p:nvSpPr>
+        <p:spPr>
+          <a:xfrm>
+            <a:off x="685800" y="4343400"/>
+            <a:ext cx="5486400" cy="4114800"/>
+          </a:xfrm>
+          <a:prstGeom prst="rect">
+            <a:avLst/>
+          </a:prstGeom>
+        </p:spPr>
+        <p:txBody>
+          <a:bodyPr spcFirstLastPara="1" wrap="square" lIns="91425" tIns="91425" rIns="91425" bIns="91425" anchor="t" anchorCtr="0">
+            <a:noAutofit/>
+          </a:bodyPr>
+          <a:lstStyle/>
+          <a:p>
+            <a:pPr marL="0" lvl="0" indent="0" algn="l" rtl="0">
+              <a:spcBef>
+                <a:spcPts val="0"/>
+              </a:spcBef>
+              <a:spcAft>
+                <a:spcPts val="0"/>
+              </a:spcAft>
+              <a:buNone/>
+            </a:pPr>
+            <a:endParaRPr/>
+          </a:p>
+        </p:txBody>
+      </p:sp>
+    </p:spTree>
+    <p:extLst>
+      <p:ext uri="{BB962C8B-B14F-4D97-AF65-F5344CB8AC3E}">
+        <p14:creationId xmlns:p14="http://schemas.microsoft.com/office/powerpoint/2010/main" val="3944115975"/>
+      </p:ext>
+    </p:extLst>
+  </p:cSld>
+  <p:clrMapOvr>
+    <a:masterClrMapping/>
+  </p:clrMapOvr>
+</p:notes>
+</file>
+
+<file path=ppt/notesSlides/notesSlide4.xml><?xml version="1.0" encoding="utf-8"?>
+<p:notes xmlns:a="http://schemas.openxmlformats.org/drawingml/2006/main" xmlns:r="http://schemas.openxmlformats.org/officeDocument/2006/relationships" xmlns:p="http://schemas.openxmlformats.org/presentationml/2006/main" showMasterSp="0" showMasterPhAnim="0">
+  <p:cSld>
+    <p:spTree>
+      <p:nvGrpSpPr>
+        <p:cNvPr id="1" name="Shape 58">
+          <a:extLst>
+            <a:ext uri="{FF2B5EF4-FFF2-40B4-BE49-F238E27FC236}">
+              <a16:creationId xmlns:a16="http://schemas.microsoft.com/office/drawing/2014/main" id="{1182C44D-2ACB-650B-EE2D-AB122D282DAB}"/>
+            </a:ext>
+          </a:extLst>
+        </p:cNvPr>
+        <p:cNvGrpSpPr/>
+        <p:nvPr/>
+      </p:nvGrpSpPr>
+      <p:grpSpPr>
+        <a:xfrm>
+          <a:off x="0" y="0"/>
+          <a:ext cx="0" cy="0"/>
+          <a:chOff x="0" y="0"/>
+          <a:chExt cx="0" cy="0"/>
+        </a:xfrm>
+      </p:grpSpPr>
+      <p:sp>
+        <p:nvSpPr>
+          <p:cNvPr id="59" name="Google Shape;59;g4df5837ef2_0_0:notes">
+            <a:extLst>
+              <a:ext uri="{FF2B5EF4-FFF2-40B4-BE49-F238E27FC236}">
+                <a16:creationId xmlns:a16="http://schemas.microsoft.com/office/drawing/2014/main" id="{FEEDBF15-5F2F-8550-1D13-8EF198C175EB}"/>
+              </a:ext>
+            </a:extLst>
+          </p:cNvPr>
+          <p:cNvSpPr>
+            <a:spLocks noGrp="1" noRot="1" noChangeAspect="1"/>
+          </p:cNvSpPr>
+          <p:nvPr>
+            <p:ph type="sldImg" idx="2"/>
+          </p:nvPr>
+        </p:nvSpPr>
+        <p:spPr>
+          <a:xfrm>
+            <a:off x="381000" y="685800"/>
+            <a:ext cx="6096000" cy="3429000"/>
+          </a:xfrm>
+          <a:custGeom>
+            <a:avLst/>
+            <a:gdLst/>
+            <a:ahLst/>
+            <a:cxnLst/>
+            <a:rect l="l" t="t" r="r" b="b"/>
+            <a:pathLst>
+              <a:path w="120000" h="120000" extrusionOk="0">
+                <a:moveTo>
+                  <a:pt x="0" y="0"/>
+                </a:moveTo>
+                <a:lnTo>
+                  <a:pt x="120000" y="0"/>
+                </a:lnTo>
+                <a:lnTo>
+                  <a:pt x="120000" y="120000"/>
+                </a:lnTo>
+                <a:lnTo>
+                  <a:pt x="0" y="120000"/>
+                </a:lnTo>
+                <a:close/>
+              </a:path>
+            </a:pathLst>
+          </a:custGeom>
+        </p:spPr>
+      </p:sp>
+      <p:sp>
+        <p:nvSpPr>
+          <p:cNvPr id="60" name="Google Shape;60;g4df5837ef2_0_0:notes">
+            <a:extLst>
+              <a:ext uri="{FF2B5EF4-FFF2-40B4-BE49-F238E27FC236}">
+                <a16:creationId xmlns:a16="http://schemas.microsoft.com/office/drawing/2014/main" id="{36D232B0-CC3B-6526-1997-9978754879BD}"/>
+              </a:ext>
+            </a:extLst>
+          </p:cNvPr>
+          <p:cNvSpPr txBox="1">
+            <a:spLocks noGrp="1"/>
+          </p:cNvSpPr>
+          <p:nvPr>
+            <p:ph type="body" idx="1"/>
+          </p:nvPr>
+        </p:nvSpPr>
+        <p:spPr>
+          <a:xfrm>
+            <a:off x="685800" y="4343400"/>
+            <a:ext cx="5486400" cy="4114800"/>
+          </a:xfrm>
+          <a:prstGeom prst="rect">
+            <a:avLst/>
+          </a:prstGeom>
+        </p:spPr>
+        <p:txBody>
+          <a:bodyPr spcFirstLastPara="1" wrap="square" lIns="91425" tIns="91425" rIns="91425" bIns="91425" anchor="t" anchorCtr="0">
+            <a:noAutofit/>
+          </a:bodyPr>
+          <a:lstStyle/>
+          <a:p>
+            <a:pPr marL="0" lvl="0" indent="0" algn="l" rtl="0">
+              <a:spcBef>
+                <a:spcPts val="0"/>
+              </a:spcBef>
+              <a:spcAft>
+                <a:spcPts val="0"/>
+              </a:spcAft>
+              <a:buNone/>
+            </a:pPr>
+            <a:endParaRPr/>
+          </a:p>
+        </p:txBody>
+      </p:sp>
+    </p:spTree>
+    <p:extLst>
+      <p:ext uri="{BB962C8B-B14F-4D97-AF65-F5344CB8AC3E}">
+        <p14:creationId xmlns:p14="http://schemas.microsoft.com/office/powerpoint/2010/main" val="1376730339"/>
+      </p:ext>
+    </p:extLst>
+  </p:cSld>
+  <p:clrMapOvr>
+    <a:masterClrMapping/>
+  </p:clrMapOvr>
+</p:notes>
+</file>
+
+<file path=ppt/notesSlides/notesSlide5.xml><?xml version="1.0" encoding="utf-8"?>
+<p:notes xmlns:a="http://schemas.openxmlformats.org/drawingml/2006/main" xmlns:r="http://schemas.openxmlformats.org/officeDocument/2006/relationships" xmlns:p="http://schemas.openxmlformats.org/presentationml/2006/main" showMasterSp="0" showMasterPhAnim="0">
+  <p:cSld>
+    <p:spTree>
+      <p:nvGrpSpPr>
+        <p:cNvPr id="1" name="Shape 58">
+          <a:extLst>
+            <a:ext uri="{FF2B5EF4-FFF2-40B4-BE49-F238E27FC236}">
+              <a16:creationId xmlns:a16="http://schemas.microsoft.com/office/drawing/2014/main" id="{796460EA-0BB2-E122-FAD2-ACC63A83E702}"/>
+            </a:ext>
+          </a:extLst>
+        </p:cNvPr>
+        <p:cNvGrpSpPr/>
+        <p:nvPr/>
+      </p:nvGrpSpPr>
+      <p:grpSpPr>
+        <a:xfrm>
+          <a:off x="0" y="0"/>
+          <a:ext cx="0" cy="0"/>
+          <a:chOff x="0" y="0"/>
+          <a:chExt cx="0" cy="0"/>
+        </a:xfrm>
+      </p:grpSpPr>
+      <p:sp>
+        <p:nvSpPr>
+          <p:cNvPr id="59" name="Google Shape;59;g4df5837ef2_0_0:notes">
+            <a:extLst>
+              <a:ext uri="{FF2B5EF4-FFF2-40B4-BE49-F238E27FC236}">
+                <a16:creationId xmlns:a16="http://schemas.microsoft.com/office/drawing/2014/main" id="{A1B5A847-03C2-45B3-6730-C59E4CC72F73}"/>
+              </a:ext>
+            </a:extLst>
+          </p:cNvPr>
+          <p:cNvSpPr>
+            <a:spLocks noGrp="1" noRot="1" noChangeAspect="1"/>
+          </p:cNvSpPr>
+          <p:nvPr>
+            <p:ph type="sldImg" idx="2"/>
+          </p:nvPr>
+        </p:nvSpPr>
+        <p:spPr>
+          <a:xfrm>
+            <a:off x="381000" y="685800"/>
+            <a:ext cx="6096000" cy="3429000"/>
+          </a:xfrm>
+          <a:custGeom>
+            <a:avLst/>
+            <a:gdLst/>
+            <a:ahLst/>
+            <a:cxnLst/>
+            <a:rect l="l" t="t" r="r" b="b"/>
+            <a:pathLst>
+              <a:path w="120000" h="120000" extrusionOk="0">
+                <a:moveTo>
+                  <a:pt x="0" y="0"/>
+                </a:moveTo>
+                <a:lnTo>
+                  <a:pt x="120000" y="0"/>
+                </a:lnTo>
+                <a:lnTo>
+                  <a:pt x="120000" y="120000"/>
+                </a:lnTo>
+                <a:lnTo>
+                  <a:pt x="0" y="120000"/>
+                </a:lnTo>
+                <a:close/>
+              </a:path>
+            </a:pathLst>
+          </a:custGeom>
+        </p:spPr>
+      </p:sp>
+      <p:sp>
+        <p:nvSpPr>
+          <p:cNvPr id="60" name="Google Shape;60;g4df5837ef2_0_0:notes">
+            <a:extLst>
+              <a:ext uri="{FF2B5EF4-FFF2-40B4-BE49-F238E27FC236}">
+                <a16:creationId xmlns:a16="http://schemas.microsoft.com/office/drawing/2014/main" id="{932390D8-DF96-C348-48F0-B38A5C1B7F16}"/>
+              </a:ext>
+            </a:extLst>
+          </p:cNvPr>
+          <p:cNvSpPr txBox="1">
+            <a:spLocks noGrp="1"/>
+          </p:cNvSpPr>
+          <p:nvPr>
+            <p:ph type="body" idx="1"/>
+          </p:nvPr>
+        </p:nvSpPr>
+        <p:spPr>
+          <a:xfrm>
+            <a:off x="685800" y="4343400"/>
+            <a:ext cx="5486400" cy="4114800"/>
+          </a:xfrm>
+          <a:prstGeom prst="rect">
+            <a:avLst/>
+          </a:prstGeom>
+        </p:spPr>
+        <p:txBody>
+          <a:bodyPr spcFirstLastPara="1" wrap="square" lIns="91425" tIns="91425" rIns="91425" bIns="91425" anchor="t" anchorCtr="0">
+            <a:noAutofit/>
+          </a:bodyPr>
+          <a:lstStyle/>
+          <a:p>
+            <a:pPr marL="0" lvl="0" indent="0" algn="l" rtl="0">
+              <a:spcBef>
+                <a:spcPts val="0"/>
+              </a:spcBef>
+              <a:spcAft>
+                <a:spcPts val="0"/>
+              </a:spcAft>
+              <a:buNone/>
+            </a:pPr>
+            <a:endParaRPr/>
+          </a:p>
+        </p:txBody>
+      </p:sp>
+    </p:spTree>
+    <p:extLst>
+      <p:ext uri="{BB962C8B-B14F-4D97-AF65-F5344CB8AC3E}">
+        <p14:creationId xmlns:p14="http://schemas.microsoft.com/office/powerpoint/2010/main" val="733039506"/>
+      </p:ext>
+    </p:extLst>
+  </p:cSld>
+  <p:clrMapOvr>
+    <a:masterClrMapping/>
+  </p:clrMapOvr>
+</p:notes>
+</file>
+
+<file path=ppt/notesSlides/notesSlide6.xml><?xml version="1.0" encoding="utf-8"?>
+<p:notes xmlns:a="http://schemas.openxmlformats.org/drawingml/2006/main" xmlns:r="http://schemas.openxmlformats.org/officeDocument/2006/relationships" xmlns:p="http://schemas.openxmlformats.org/presentationml/2006/main" showMasterSp="0" showMasterPhAnim="0">
+  <p:cSld>
+    <p:spTree>
+      <p:nvGrpSpPr>
+        <p:cNvPr id="1" name="Shape 58">
+          <a:extLst>
+            <a:ext uri="{FF2B5EF4-FFF2-40B4-BE49-F238E27FC236}">
+              <a16:creationId xmlns:a16="http://schemas.microsoft.com/office/drawing/2014/main" id="{E1B65ADB-FF11-1C6B-C6D8-A9BE58DF9A9C}"/>
+            </a:ext>
+          </a:extLst>
+        </p:cNvPr>
+        <p:cNvGrpSpPr/>
+        <p:nvPr/>
+      </p:nvGrpSpPr>
+      <p:grpSpPr>
+        <a:xfrm>
+          <a:off x="0" y="0"/>
+          <a:ext cx="0" cy="0"/>
+          <a:chOff x="0" y="0"/>
+          <a:chExt cx="0" cy="0"/>
+        </a:xfrm>
+      </p:grpSpPr>
+      <p:sp>
+        <p:nvSpPr>
+          <p:cNvPr id="59" name="Google Shape;59;g4df5837ef2_0_0:notes">
+            <a:extLst>
+              <a:ext uri="{FF2B5EF4-FFF2-40B4-BE49-F238E27FC236}">
+                <a16:creationId xmlns:a16="http://schemas.microsoft.com/office/drawing/2014/main" id="{6B2AE0B7-68EF-0079-4D3D-80A77E3E7DCE}"/>
+              </a:ext>
+            </a:extLst>
+          </p:cNvPr>
+          <p:cNvSpPr>
+            <a:spLocks noGrp="1" noRot="1" noChangeAspect="1"/>
+          </p:cNvSpPr>
+          <p:nvPr>
+            <p:ph type="sldImg" idx="2"/>
+          </p:nvPr>
+        </p:nvSpPr>
+        <p:spPr>
+          <a:xfrm>
+            <a:off x="381000" y="685800"/>
+            <a:ext cx="6096000" cy="3429000"/>
+          </a:xfrm>
+          <a:custGeom>
+            <a:avLst/>
+            <a:gdLst/>
+            <a:ahLst/>
+            <a:cxnLst/>
+            <a:rect l="l" t="t" r="r" b="b"/>
+            <a:pathLst>
+              <a:path w="120000" h="120000" extrusionOk="0">
+                <a:moveTo>
+                  <a:pt x="0" y="0"/>
+                </a:moveTo>
+                <a:lnTo>
+                  <a:pt x="120000" y="0"/>
+                </a:lnTo>
+                <a:lnTo>
+                  <a:pt x="120000" y="120000"/>
+                </a:lnTo>
+                <a:lnTo>
+                  <a:pt x="0" y="120000"/>
+                </a:lnTo>
+                <a:close/>
+              </a:path>
+            </a:pathLst>
+          </a:custGeom>
+        </p:spPr>
+      </p:sp>
+      <p:sp>
+        <p:nvSpPr>
+          <p:cNvPr id="60" name="Google Shape;60;g4df5837ef2_0_0:notes">
+            <a:extLst>
+              <a:ext uri="{FF2B5EF4-FFF2-40B4-BE49-F238E27FC236}">
+                <a16:creationId xmlns:a16="http://schemas.microsoft.com/office/drawing/2014/main" id="{284FC9B6-55FF-19A3-4A50-58ABBDD9165A}"/>
+              </a:ext>
+            </a:extLst>
+          </p:cNvPr>
+          <p:cNvSpPr txBox="1">
+            <a:spLocks noGrp="1"/>
+          </p:cNvSpPr>
+          <p:nvPr>
+            <p:ph type="body" idx="1"/>
+          </p:nvPr>
+        </p:nvSpPr>
+        <p:spPr>
+          <a:xfrm>
+            <a:off x="685800" y="4343400"/>
+            <a:ext cx="5486400" cy="4114800"/>
+          </a:xfrm>
+          <a:prstGeom prst="rect">
+            <a:avLst/>
+          </a:prstGeom>
+        </p:spPr>
+        <p:txBody>
+          <a:bodyPr spcFirstLastPara="1" wrap="square" lIns="91425" tIns="91425" rIns="91425" bIns="91425" anchor="t" anchorCtr="0">
+            <a:noAutofit/>
+          </a:bodyPr>
+          <a:lstStyle/>
+          <a:p>
+            <a:pPr marL="0" lvl="0" indent="0" algn="l" rtl="0">
+              <a:spcBef>
+                <a:spcPts val="0"/>
+              </a:spcBef>
+              <a:spcAft>
+                <a:spcPts val="0"/>
+              </a:spcAft>
+              <a:buNone/>
+            </a:pPr>
+            <a:endParaRPr/>
+          </a:p>
+        </p:txBody>
+      </p:sp>
+    </p:spTree>
+    <p:extLst>
+      <p:ext uri="{BB962C8B-B14F-4D97-AF65-F5344CB8AC3E}">
+        <p14:creationId xmlns:p14="http://schemas.microsoft.com/office/powerpoint/2010/main" val="187754226"/>
+      </p:ext>
+    </p:extLst>
+  </p:cSld>
+  <p:clrMapOvr>
+    <a:masterClrMapping/>
+  </p:clrMapOvr>
+</p:notes>
+</file>
+
+<file path=ppt/notesSlides/notesSlide7.xml><?xml version="1.0" encoding="utf-8"?>
+<p:notes xmlns:a="http://schemas.openxmlformats.org/drawingml/2006/main" xmlns:r="http://schemas.openxmlformats.org/officeDocument/2006/relationships" xmlns:p="http://schemas.openxmlformats.org/presentationml/2006/main" showMasterSp="0" showMasterPhAnim="0">
+  <p:cSld>
+    <p:spTree>
+      <p:nvGrpSpPr>
+        <p:cNvPr id="1" name="Shape 58">
+          <a:extLst>
+            <a:ext uri="{FF2B5EF4-FFF2-40B4-BE49-F238E27FC236}">
+              <a16:creationId xmlns:a16="http://schemas.microsoft.com/office/drawing/2014/main" id="{84AAD02F-A672-3312-B787-FEFB3DF07C90}"/>
+            </a:ext>
+          </a:extLst>
+        </p:cNvPr>
+        <p:cNvGrpSpPr/>
+        <p:nvPr/>
+      </p:nvGrpSpPr>
+      <p:grpSpPr>
+        <a:xfrm>
+          <a:off x="0" y="0"/>
+          <a:ext cx="0" cy="0"/>
+          <a:chOff x="0" y="0"/>
+          <a:chExt cx="0" cy="0"/>
+        </a:xfrm>
+      </p:grpSpPr>
+      <p:sp>
+        <p:nvSpPr>
+          <p:cNvPr id="59" name="Google Shape;59;g4df5837ef2_0_0:notes">
+            <a:extLst>
+              <a:ext uri="{FF2B5EF4-FFF2-40B4-BE49-F238E27FC236}">
+                <a16:creationId xmlns:a16="http://schemas.microsoft.com/office/drawing/2014/main" id="{3FA51F89-8A13-D03C-D5A4-A9E0D0316AC7}"/>
+              </a:ext>
+            </a:extLst>
+          </p:cNvPr>
+          <p:cNvSpPr>
+            <a:spLocks noGrp="1" noRot="1" noChangeAspect="1"/>
+          </p:cNvSpPr>
+          <p:nvPr>
+            <p:ph type="sldImg" idx="2"/>
+          </p:nvPr>
+        </p:nvSpPr>
+        <p:spPr>
+          <a:xfrm>
+            <a:off x="381000" y="685800"/>
+            <a:ext cx="6096000" cy="3429000"/>
+          </a:xfrm>
+          <a:custGeom>
+            <a:avLst/>
+            <a:gdLst/>
+            <a:ahLst/>
+            <a:cxnLst/>
+            <a:rect l="l" t="t" r="r" b="b"/>
+            <a:pathLst>
+              <a:path w="120000" h="120000" extrusionOk="0">
+                <a:moveTo>
+                  <a:pt x="0" y="0"/>
+                </a:moveTo>
+                <a:lnTo>
+                  <a:pt x="120000" y="0"/>
+                </a:lnTo>
+                <a:lnTo>
+                  <a:pt x="120000" y="120000"/>
+                </a:lnTo>
+                <a:lnTo>
+                  <a:pt x="0" y="120000"/>
+                </a:lnTo>
+                <a:close/>
+              </a:path>
+            </a:pathLst>
+          </a:custGeom>
+        </p:spPr>
+      </p:sp>
+      <p:sp>
+        <p:nvSpPr>
+          <p:cNvPr id="60" name="Google Shape;60;g4df5837ef2_0_0:notes">
+            <a:extLst>
+              <a:ext uri="{FF2B5EF4-FFF2-40B4-BE49-F238E27FC236}">
+                <a16:creationId xmlns:a16="http://schemas.microsoft.com/office/drawing/2014/main" id="{7E5A4789-2707-6FE5-4EA5-51E83DD27666}"/>
+              </a:ext>
+            </a:extLst>
+          </p:cNvPr>
+          <p:cNvSpPr txBox="1">
+            <a:spLocks noGrp="1"/>
+          </p:cNvSpPr>
+          <p:nvPr>
+            <p:ph type="body" idx="1"/>
+          </p:nvPr>
+        </p:nvSpPr>
+        <p:spPr>
+          <a:xfrm>
+            <a:off x="685800" y="4343400"/>
+            <a:ext cx="5486400" cy="4114800"/>
+          </a:xfrm>
+          <a:prstGeom prst="rect">
+            <a:avLst/>
+          </a:prstGeom>
+        </p:spPr>
+        <p:txBody>
+          <a:bodyPr spcFirstLastPara="1" wrap="square" lIns="91425" tIns="91425" rIns="91425" bIns="91425" anchor="t" anchorCtr="0">
+            <a:noAutofit/>
+          </a:bodyPr>
+          <a:lstStyle/>
+          <a:p>
+            <a:pPr marL="0" lvl="0" indent="0" algn="l" rtl="0">
+              <a:spcBef>
+                <a:spcPts val="0"/>
+              </a:spcBef>
+              <a:spcAft>
+                <a:spcPts val="0"/>
+              </a:spcAft>
+              <a:buNone/>
+            </a:pPr>
+            <a:endParaRPr/>
+          </a:p>
+        </p:txBody>
+      </p:sp>
+    </p:spTree>
+    <p:extLst>
+      <p:ext uri="{BB962C8B-B14F-4D97-AF65-F5344CB8AC3E}">
+        <p14:creationId xmlns:p14="http://schemas.microsoft.com/office/powerpoint/2010/main" val="3845339031"/>
+      </p:ext>
+    </p:extLst>
+  </p:cSld>
+  <p:clrMapOvr>
+    <a:masterClrMapping/>
+  </p:clrMapOvr>
+</p:notes>
+</file>
+
+<file path=ppt/notesSlides/notesSlide8.xml><?xml version="1.0" encoding="utf-8"?>
+<p:notes xmlns:a="http://schemas.openxmlformats.org/drawingml/2006/main" xmlns:r="http://schemas.openxmlformats.org/officeDocument/2006/relationships" xmlns:p="http://schemas.openxmlformats.org/presentationml/2006/main" showMasterSp="0" showMasterPhAnim="0">
+  <p:cSld>
+    <p:spTree>
+      <p:nvGrpSpPr>
         <p:cNvPr id="1" name="Shape 64"/>
         <p:cNvGrpSpPr/>
         <p:nvPr/>
@@ -1430,7 +2682,7 @@
 </p:notes>
 </file>
 
-<file path=ppt/notesSlides/notesSlide4.xml><?xml version="1.0" encoding="utf-8"?>
+<file path=ppt/notesSlides/notesSlide9.xml><?xml version="1.0" encoding="utf-8"?>
 <p:notes xmlns:a="http://schemas.openxmlformats.org/drawingml/2006/main" xmlns:r="http://schemas.openxmlformats.org/officeDocument/2006/relationships" xmlns:p="http://schemas.openxmlformats.org/presentationml/2006/main" showMasterSp="0" showMasterPhAnim="0">
   <p:cSld>
     <p:spTree>
@@ -1548,618 +2800,6 @@
     <p:extLst>
       <p:ext uri="{BB962C8B-B14F-4D97-AF65-F5344CB8AC3E}">
         <p14:creationId xmlns:p14="http://schemas.microsoft.com/office/powerpoint/2010/main" val="1894874700"/>
-      </p:ext>
-    </p:extLst>
-  </p:cSld>
-  <p:clrMapOvr>
-    <a:masterClrMapping/>
-  </p:clrMapOvr>
-</p:notes>
-</file>
-
-<file path=ppt/notesSlides/notesSlide5.xml><?xml version="1.0" encoding="utf-8"?>
-<p:notes xmlns:a="http://schemas.openxmlformats.org/drawingml/2006/main" xmlns:r="http://schemas.openxmlformats.org/officeDocument/2006/relationships" xmlns:p="http://schemas.openxmlformats.org/presentationml/2006/main" showMasterSp="0" showMasterPhAnim="0">
-  <p:cSld>
-    <p:spTree>
-      <p:nvGrpSpPr>
-        <p:cNvPr id="1" name="Shape 64">
-          <a:extLst>
-            <a:ext uri="{FF2B5EF4-FFF2-40B4-BE49-F238E27FC236}">
-              <a16:creationId xmlns:a16="http://schemas.microsoft.com/office/drawing/2014/main" id="{FFF1861E-9CBA-247E-2A25-892CC1F8CDF4}"/>
-            </a:ext>
-          </a:extLst>
-        </p:cNvPr>
-        <p:cNvGrpSpPr/>
-        <p:nvPr/>
-      </p:nvGrpSpPr>
-      <p:grpSpPr>
-        <a:xfrm>
-          <a:off x="0" y="0"/>
-          <a:ext cx="0" cy="0"/>
-          <a:chOff x="0" y="0"/>
-          <a:chExt cx="0" cy="0"/>
-        </a:xfrm>
-      </p:grpSpPr>
-      <p:sp>
-        <p:nvSpPr>
-          <p:cNvPr id="65" name="Google Shape;65;g2824b25c245_0_0:notes">
-            <a:extLst>
-              <a:ext uri="{FF2B5EF4-FFF2-40B4-BE49-F238E27FC236}">
-                <a16:creationId xmlns:a16="http://schemas.microsoft.com/office/drawing/2014/main" id="{C89C5658-25D0-EFD0-EDC3-57802B842563}"/>
-              </a:ext>
-            </a:extLst>
-          </p:cNvPr>
-          <p:cNvSpPr>
-            <a:spLocks noGrp="1" noRot="1" noChangeAspect="1"/>
-          </p:cNvSpPr>
-          <p:nvPr>
-            <p:ph type="sldImg" idx="2"/>
-          </p:nvPr>
-        </p:nvSpPr>
-        <p:spPr>
-          <a:xfrm>
-            <a:off x="381000" y="685800"/>
-            <a:ext cx="6096000" cy="3429000"/>
-          </a:xfrm>
-          <a:custGeom>
-            <a:avLst/>
-            <a:gdLst/>
-            <a:ahLst/>
-            <a:cxnLst/>
-            <a:rect l="l" t="t" r="r" b="b"/>
-            <a:pathLst>
-              <a:path w="120000" h="120000" extrusionOk="0">
-                <a:moveTo>
-                  <a:pt x="0" y="0"/>
-                </a:moveTo>
-                <a:lnTo>
-                  <a:pt x="120000" y="0"/>
-                </a:lnTo>
-                <a:lnTo>
-                  <a:pt x="120000" y="120000"/>
-                </a:lnTo>
-                <a:lnTo>
-                  <a:pt x="0" y="120000"/>
-                </a:lnTo>
-                <a:close/>
-              </a:path>
-            </a:pathLst>
-          </a:custGeom>
-        </p:spPr>
-      </p:sp>
-      <p:sp>
-        <p:nvSpPr>
-          <p:cNvPr id="66" name="Google Shape;66;g2824b25c245_0_0:notes">
-            <a:extLst>
-              <a:ext uri="{FF2B5EF4-FFF2-40B4-BE49-F238E27FC236}">
-                <a16:creationId xmlns:a16="http://schemas.microsoft.com/office/drawing/2014/main" id="{6E52B0FF-9A1F-5789-6DAA-2531250B4E25}"/>
-              </a:ext>
-            </a:extLst>
-          </p:cNvPr>
-          <p:cNvSpPr txBox="1">
-            <a:spLocks noGrp="1"/>
-          </p:cNvSpPr>
-          <p:nvPr>
-            <p:ph type="body" idx="1"/>
-          </p:nvPr>
-        </p:nvSpPr>
-        <p:spPr>
-          <a:xfrm>
-            <a:off x="685800" y="4343400"/>
-            <a:ext cx="5486400" cy="4114800"/>
-          </a:xfrm>
-          <a:prstGeom prst="rect">
-            <a:avLst/>
-          </a:prstGeom>
-        </p:spPr>
-        <p:txBody>
-          <a:bodyPr spcFirstLastPara="1" wrap="square" lIns="91425" tIns="91425" rIns="91425" bIns="91425" anchor="t" anchorCtr="0">
-            <a:noAutofit/>
-          </a:bodyPr>
-          <a:lstStyle/>
-          <a:p>
-            <a:pPr marL="0" lvl="0" indent="0" algn="l" rtl="0">
-              <a:spcBef>
-                <a:spcPts val="0"/>
-              </a:spcBef>
-              <a:spcAft>
-                <a:spcPts val="0"/>
-              </a:spcAft>
-              <a:buNone/>
-            </a:pPr>
-            <a:endParaRPr/>
-          </a:p>
-        </p:txBody>
-      </p:sp>
-    </p:spTree>
-    <p:extLst>
-      <p:ext uri="{BB962C8B-B14F-4D97-AF65-F5344CB8AC3E}">
-        <p14:creationId xmlns:p14="http://schemas.microsoft.com/office/powerpoint/2010/main" val="387291815"/>
-      </p:ext>
-    </p:extLst>
-  </p:cSld>
-  <p:clrMapOvr>
-    <a:masterClrMapping/>
-  </p:clrMapOvr>
-</p:notes>
-</file>
-
-<file path=ppt/notesSlides/notesSlide6.xml><?xml version="1.0" encoding="utf-8"?>
-<p:notes xmlns:a="http://schemas.openxmlformats.org/drawingml/2006/main" xmlns:r="http://schemas.openxmlformats.org/officeDocument/2006/relationships" xmlns:p="http://schemas.openxmlformats.org/presentationml/2006/main" showMasterSp="0" showMasterPhAnim="0">
-  <p:cSld>
-    <p:spTree>
-      <p:nvGrpSpPr>
-        <p:cNvPr id="1" name="Shape 64">
-          <a:extLst>
-            <a:ext uri="{FF2B5EF4-FFF2-40B4-BE49-F238E27FC236}">
-              <a16:creationId xmlns:a16="http://schemas.microsoft.com/office/drawing/2014/main" id="{D6172B3C-1CA5-C295-7A5C-A1F251A33CF4}"/>
-            </a:ext>
-          </a:extLst>
-        </p:cNvPr>
-        <p:cNvGrpSpPr/>
-        <p:nvPr/>
-      </p:nvGrpSpPr>
-      <p:grpSpPr>
-        <a:xfrm>
-          <a:off x="0" y="0"/>
-          <a:ext cx="0" cy="0"/>
-          <a:chOff x="0" y="0"/>
-          <a:chExt cx="0" cy="0"/>
-        </a:xfrm>
-      </p:grpSpPr>
-      <p:sp>
-        <p:nvSpPr>
-          <p:cNvPr id="65" name="Google Shape;65;g2824b25c245_0_0:notes">
-            <a:extLst>
-              <a:ext uri="{FF2B5EF4-FFF2-40B4-BE49-F238E27FC236}">
-                <a16:creationId xmlns:a16="http://schemas.microsoft.com/office/drawing/2014/main" id="{ACB66052-444C-A72F-7220-1172E8F23EB3}"/>
-              </a:ext>
-            </a:extLst>
-          </p:cNvPr>
-          <p:cNvSpPr>
-            <a:spLocks noGrp="1" noRot="1" noChangeAspect="1"/>
-          </p:cNvSpPr>
-          <p:nvPr>
-            <p:ph type="sldImg" idx="2"/>
-          </p:nvPr>
-        </p:nvSpPr>
-        <p:spPr>
-          <a:xfrm>
-            <a:off x="381000" y="685800"/>
-            <a:ext cx="6096000" cy="3429000"/>
-          </a:xfrm>
-          <a:custGeom>
-            <a:avLst/>
-            <a:gdLst/>
-            <a:ahLst/>
-            <a:cxnLst/>
-            <a:rect l="l" t="t" r="r" b="b"/>
-            <a:pathLst>
-              <a:path w="120000" h="120000" extrusionOk="0">
-                <a:moveTo>
-                  <a:pt x="0" y="0"/>
-                </a:moveTo>
-                <a:lnTo>
-                  <a:pt x="120000" y="0"/>
-                </a:lnTo>
-                <a:lnTo>
-                  <a:pt x="120000" y="120000"/>
-                </a:lnTo>
-                <a:lnTo>
-                  <a:pt x="0" y="120000"/>
-                </a:lnTo>
-                <a:close/>
-              </a:path>
-            </a:pathLst>
-          </a:custGeom>
-        </p:spPr>
-      </p:sp>
-      <p:sp>
-        <p:nvSpPr>
-          <p:cNvPr id="66" name="Google Shape;66;g2824b25c245_0_0:notes">
-            <a:extLst>
-              <a:ext uri="{FF2B5EF4-FFF2-40B4-BE49-F238E27FC236}">
-                <a16:creationId xmlns:a16="http://schemas.microsoft.com/office/drawing/2014/main" id="{DC20A055-825E-2BBE-843A-812600E30758}"/>
-              </a:ext>
-            </a:extLst>
-          </p:cNvPr>
-          <p:cNvSpPr txBox="1">
-            <a:spLocks noGrp="1"/>
-          </p:cNvSpPr>
-          <p:nvPr>
-            <p:ph type="body" idx="1"/>
-          </p:nvPr>
-        </p:nvSpPr>
-        <p:spPr>
-          <a:xfrm>
-            <a:off x="685800" y="4343400"/>
-            <a:ext cx="5486400" cy="4114800"/>
-          </a:xfrm>
-          <a:prstGeom prst="rect">
-            <a:avLst/>
-          </a:prstGeom>
-        </p:spPr>
-        <p:txBody>
-          <a:bodyPr spcFirstLastPara="1" wrap="square" lIns="91425" tIns="91425" rIns="91425" bIns="91425" anchor="t" anchorCtr="0">
-            <a:noAutofit/>
-          </a:bodyPr>
-          <a:lstStyle/>
-          <a:p>
-            <a:pPr marL="0" lvl="0" indent="0" algn="l" rtl="0">
-              <a:spcBef>
-                <a:spcPts val="0"/>
-              </a:spcBef>
-              <a:spcAft>
-                <a:spcPts val="0"/>
-              </a:spcAft>
-              <a:buNone/>
-            </a:pPr>
-            <a:endParaRPr/>
-          </a:p>
-        </p:txBody>
-      </p:sp>
-    </p:spTree>
-    <p:extLst>
-      <p:ext uri="{BB962C8B-B14F-4D97-AF65-F5344CB8AC3E}">
-        <p14:creationId xmlns:p14="http://schemas.microsoft.com/office/powerpoint/2010/main" val="965162364"/>
-      </p:ext>
-    </p:extLst>
-  </p:cSld>
-  <p:clrMapOvr>
-    <a:masterClrMapping/>
-  </p:clrMapOvr>
-</p:notes>
-</file>
-
-<file path=ppt/notesSlides/notesSlide7.xml><?xml version="1.0" encoding="utf-8"?>
-<p:notes xmlns:a="http://schemas.openxmlformats.org/drawingml/2006/main" xmlns:r="http://schemas.openxmlformats.org/officeDocument/2006/relationships" xmlns:p="http://schemas.openxmlformats.org/presentationml/2006/main" showMasterSp="0" showMasterPhAnim="0">
-  <p:cSld>
-    <p:spTree>
-      <p:nvGrpSpPr>
-        <p:cNvPr id="1" name="Shape 64">
-          <a:extLst>
-            <a:ext uri="{FF2B5EF4-FFF2-40B4-BE49-F238E27FC236}">
-              <a16:creationId xmlns:a16="http://schemas.microsoft.com/office/drawing/2014/main" id="{FBABF2A7-8CB1-575D-88FF-04BEE615314E}"/>
-            </a:ext>
-          </a:extLst>
-        </p:cNvPr>
-        <p:cNvGrpSpPr/>
-        <p:nvPr/>
-      </p:nvGrpSpPr>
-      <p:grpSpPr>
-        <a:xfrm>
-          <a:off x="0" y="0"/>
-          <a:ext cx="0" cy="0"/>
-          <a:chOff x="0" y="0"/>
-          <a:chExt cx="0" cy="0"/>
-        </a:xfrm>
-      </p:grpSpPr>
-      <p:sp>
-        <p:nvSpPr>
-          <p:cNvPr id="65" name="Google Shape;65;g2824b25c245_0_0:notes">
-            <a:extLst>
-              <a:ext uri="{FF2B5EF4-FFF2-40B4-BE49-F238E27FC236}">
-                <a16:creationId xmlns:a16="http://schemas.microsoft.com/office/drawing/2014/main" id="{191E0886-EE7E-D759-CAC5-A0C554B8F663}"/>
-              </a:ext>
-            </a:extLst>
-          </p:cNvPr>
-          <p:cNvSpPr>
-            <a:spLocks noGrp="1" noRot="1" noChangeAspect="1"/>
-          </p:cNvSpPr>
-          <p:nvPr>
-            <p:ph type="sldImg" idx="2"/>
-          </p:nvPr>
-        </p:nvSpPr>
-        <p:spPr>
-          <a:xfrm>
-            <a:off x="381000" y="685800"/>
-            <a:ext cx="6096000" cy="3429000"/>
-          </a:xfrm>
-          <a:custGeom>
-            <a:avLst/>
-            <a:gdLst/>
-            <a:ahLst/>
-            <a:cxnLst/>
-            <a:rect l="l" t="t" r="r" b="b"/>
-            <a:pathLst>
-              <a:path w="120000" h="120000" extrusionOk="0">
-                <a:moveTo>
-                  <a:pt x="0" y="0"/>
-                </a:moveTo>
-                <a:lnTo>
-                  <a:pt x="120000" y="0"/>
-                </a:lnTo>
-                <a:lnTo>
-                  <a:pt x="120000" y="120000"/>
-                </a:lnTo>
-                <a:lnTo>
-                  <a:pt x="0" y="120000"/>
-                </a:lnTo>
-                <a:close/>
-              </a:path>
-            </a:pathLst>
-          </a:custGeom>
-        </p:spPr>
-      </p:sp>
-      <p:sp>
-        <p:nvSpPr>
-          <p:cNvPr id="66" name="Google Shape;66;g2824b25c245_0_0:notes">
-            <a:extLst>
-              <a:ext uri="{FF2B5EF4-FFF2-40B4-BE49-F238E27FC236}">
-                <a16:creationId xmlns:a16="http://schemas.microsoft.com/office/drawing/2014/main" id="{FD8A55B7-9A95-F73C-7BE3-02C7A334A5D1}"/>
-              </a:ext>
-            </a:extLst>
-          </p:cNvPr>
-          <p:cNvSpPr txBox="1">
-            <a:spLocks noGrp="1"/>
-          </p:cNvSpPr>
-          <p:nvPr>
-            <p:ph type="body" idx="1"/>
-          </p:nvPr>
-        </p:nvSpPr>
-        <p:spPr>
-          <a:xfrm>
-            <a:off x="685800" y="4343400"/>
-            <a:ext cx="5486400" cy="4114800"/>
-          </a:xfrm>
-          <a:prstGeom prst="rect">
-            <a:avLst/>
-          </a:prstGeom>
-        </p:spPr>
-        <p:txBody>
-          <a:bodyPr spcFirstLastPara="1" wrap="square" lIns="91425" tIns="91425" rIns="91425" bIns="91425" anchor="t" anchorCtr="0">
-            <a:noAutofit/>
-          </a:bodyPr>
-          <a:lstStyle/>
-          <a:p>
-            <a:pPr marL="0" lvl="0" indent="0" algn="l" rtl="0">
-              <a:spcBef>
-                <a:spcPts val="0"/>
-              </a:spcBef>
-              <a:spcAft>
-                <a:spcPts val="0"/>
-              </a:spcAft>
-              <a:buNone/>
-            </a:pPr>
-            <a:endParaRPr/>
-          </a:p>
-        </p:txBody>
-      </p:sp>
-    </p:spTree>
-    <p:extLst>
-      <p:ext uri="{BB962C8B-B14F-4D97-AF65-F5344CB8AC3E}">
-        <p14:creationId xmlns:p14="http://schemas.microsoft.com/office/powerpoint/2010/main" val="1679186901"/>
-      </p:ext>
-    </p:extLst>
-  </p:cSld>
-  <p:clrMapOvr>
-    <a:masterClrMapping/>
-  </p:clrMapOvr>
-</p:notes>
-</file>
-
-<file path=ppt/notesSlides/notesSlide8.xml><?xml version="1.0" encoding="utf-8"?>
-<p:notes xmlns:a="http://schemas.openxmlformats.org/drawingml/2006/main" xmlns:r="http://schemas.openxmlformats.org/officeDocument/2006/relationships" xmlns:p="http://schemas.openxmlformats.org/presentationml/2006/main" showMasterSp="0" showMasterPhAnim="0">
-  <p:cSld>
-    <p:spTree>
-      <p:nvGrpSpPr>
-        <p:cNvPr id="1" name="Shape 69"/>
-        <p:cNvGrpSpPr/>
-        <p:nvPr/>
-      </p:nvGrpSpPr>
-      <p:grpSpPr>
-        <a:xfrm>
-          <a:off x="0" y="0"/>
-          <a:ext cx="0" cy="0"/>
-          <a:chOff x="0" y="0"/>
-          <a:chExt cx="0" cy="0"/>
-        </a:xfrm>
-      </p:grpSpPr>
-      <p:sp>
-        <p:nvSpPr>
-          <p:cNvPr id="70" name="Google Shape;70;g4df5837ef2_0_5:notes"/>
-          <p:cNvSpPr>
-            <a:spLocks noGrp="1" noRot="1" noChangeAspect="1"/>
-          </p:cNvSpPr>
-          <p:nvPr>
-            <p:ph type="sldImg" idx="2"/>
-          </p:nvPr>
-        </p:nvSpPr>
-        <p:spPr>
-          <a:xfrm>
-            <a:off x="381000" y="685800"/>
-            <a:ext cx="6096000" cy="3429000"/>
-          </a:xfrm>
-          <a:custGeom>
-            <a:avLst/>
-            <a:gdLst/>
-            <a:ahLst/>
-            <a:cxnLst/>
-            <a:rect l="l" t="t" r="r" b="b"/>
-            <a:pathLst>
-              <a:path w="120000" h="120000" extrusionOk="0">
-                <a:moveTo>
-                  <a:pt x="0" y="0"/>
-                </a:moveTo>
-                <a:lnTo>
-                  <a:pt x="120000" y="0"/>
-                </a:lnTo>
-                <a:lnTo>
-                  <a:pt x="120000" y="120000"/>
-                </a:lnTo>
-                <a:lnTo>
-                  <a:pt x="0" y="120000"/>
-                </a:lnTo>
-                <a:close/>
-              </a:path>
-            </a:pathLst>
-          </a:custGeom>
-        </p:spPr>
-      </p:sp>
-      <p:sp>
-        <p:nvSpPr>
-          <p:cNvPr id="71" name="Google Shape;71;g4df5837ef2_0_5:notes"/>
-          <p:cNvSpPr txBox="1">
-            <a:spLocks noGrp="1"/>
-          </p:cNvSpPr>
-          <p:nvPr>
-            <p:ph type="body" idx="1"/>
-          </p:nvPr>
-        </p:nvSpPr>
-        <p:spPr>
-          <a:xfrm>
-            <a:off x="685800" y="4343400"/>
-            <a:ext cx="5486400" cy="4114800"/>
-          </a:xfrm>
-          <a:prstGeom prst="rect">
-            <a:avLst/>
-          </a:prstGeom>
-        </p:spPr>
-        <p:txBody>
-          <a:bodyPr spcFirstLastPara="1" wrap="square" lIns="91425" tIns="91425" rIns="91425" bIns="91425" anchor="t" anchorCtr="0">
-            <a:noAutofit/>
-          </a:bodyPr>
-          <a:lstStyle/>
-          <a:p>
-            <a:pPr marL="0" lvl="0" indent="0" algn="l" rtl="0">
-              <a:spcBef>
-                <a:spcPts val="0"/>
-              </a:spcBef>
-              <a:spcAft>
-                <a:spcPts val="0"/>
-              </a:spcAft>
-              <a:buNone/>
-            </a:pPr>
-            <a:endParaRPr/>
-          </a:p>
-        </p:txBody>
-      </p:sp>
-    </p:spTree>
-  </p:cSld>
-  <p:clrMapOvr>
-    <a:masterClrMapping/>
-  </p:clrMapOvr>
-</p:notes>
-</file>
-
-<file path=ppt/notesSlides/notesSlide9.xml><?xml version="1.0" encoding="utf-8"?>
-<p:notes xmlns:a="http://schemas.openxmlformats.org/drawingml/2006/main" xmlns:r="http://schemas.openxmlformats.org/officeDocument/2006/relationships" xmlns:p="http://schemas.openxmlformats.org/presentationml/2006/main" showMasterSp="0" showMasterPhAnim="0">
-  <p:cSld>
-    <p:spTree>
-      <p:nvGrpSpPr>
-        <p:cNvPr id="1" name="Shape 69">
-          <a:extLst>
-            <a:ext uri="{FF2B5EF4-FFF2-40B4-BE49-F238E27FC236}">
-              <a16:creationId xmlns:a16="http://schemas.microsoft.com/office/drawing/2014/main" id="{7F2D1602-9942-F704-E77A-0426C4A91153}"/>
-            </a:ext>
-          </a:extLst>
-        </p:cNvPr>
-        <p:cNvGrpSpPr/>
-        <p:nvPr/>
-      </p:nvGrpSpPr>
-      <p:grpSpPr>
-        <a:xfrm>
-          <a:off x="0" y="0"/>
-          <a:ext cx="0" cy="0"/>
-          <a:chOff x="0" y="0"/>
-          <a:chExt cx="0" cy="0"/>
-        </a:xfrm>
-      </p:grpSpPr>
-      <p:sp>
-        <p:nvSpPr>
-          <p:cNvPr id="70" name="Google Shape;70;g4df5837ef2_0_5:notes">
-            <a:extLst>
-              <a:ext uri="{FF2B5EF4-FFF2-40B4-BE49-F238E27FC236}">
-                <a16:creationId xmlns:a16="http://schemas.microsoft.com/office/drawing/2014/main" id="{238033AF-B8DA-E33C-C80B-45F81AF9B0FE}"/>
-              </a:ext>
-            </a:extLst>
-          </p:cNvPr>
-          <p:cNvSpPr>
-            <a:spLocks noGrp="1" noRot="1" noChangeAspect="1"/>
-          </p:cNvSpPr>
-          <p:nvPr>
-            <p:ph type="sldImg" idx="2"/>
-          </p:nvPr>
-        </p:nvSpPr>
-        <p:spPr>
-          <a:xfrm>
-            <a:off x="381000" y="685800"/>
-            <a:ext cx="6096000" cy="3429000"/>
-          </a:xfrm>
-          <a:custGeom>
-            <a:avLst/>
-            <a:gdLst/>
-            <a:ahLst/>
-            <a:cxnLst/>
-            <a:rect l="l" t="t" r="r" b="b"/>
-            <a:pathLst>
-              <a:path w="120000" h="120000" extrusionOk="0">
-                <a:moveTo>
-                  <a:pt x="0" y="0"/>
-                </a:moveTo>
-                <a:lnTo>
-                  <a:pt x="120000" y="0"/>
-                </a:lnTo>
-                <a:lnTo>
-                  <a:pt x="120000" y="120000"/>
-                </a:lnTo>
-                <a:lnTo>
-                  <a:pt x="0" y="120000"/>
-                </a:lnTo>
-                <a:close/>
-              </a:path>
-            </a:pathLst>
-          </a:custGeom>
-        </p:spPr>
-      </p:sp>
-      <p:sp>
-        <p:nvSpPr>
-          <p:cNvPr id="71" name="Google Shape;71;g4df5837ef2_0_5:notes">
-            <a:extLst>
-              <a:ext uri="{FF2B5EF4-FFF2-40B4-BE49-F238E27FC236}">
-                <a16:creationId xmlns:a16="http://schemas.microsoft.com/office/drawing/2014/main" id="{906A643E-A51B-046F-BDAC-261D63AF9413}"/>
-              </a:ext>
-            </a:extLst>
-          </p:cNvPr>
-          <p:cNvSpPr txBox="1">
-            <a:spLocks noGrp="1"/>
-          </p:cNvSpPr>
-          <p:nvPr>
-            <p:ph type="body" idx="1"/>
-          </p:nvPr>
-        </p:nvSpPr>
-        <p:spPr>
-          <a:xfrm>
-            <a:off x="685800" y="4343400"/>
-            <a:ext cx="5486400" cy="4114800"/>
-          </a:xfrm>
-          <a:prstGeom prst="rect">
-            <a:avLst/>
-          </a:prstGeom>
-        </p:spPr>
-        <p:txBody>
-          <a:bodyPr spcFirstLastPara="1" wrap="square" lIns="91425" tIns="91425" rIns="91425" bIns="91425" anchor="t" anchorCtr="0">
-            <a:noAutofit/>
-          </a:bodyPr>
-          <a:lstStyle/>
-          <a:p>
-            <a:pPr marL="0" lvl="0" indent="0" algn="l" rtl="0">
-              <a:spcBef>
-                <a:spcPts val="0"/>
-              </a:spcBef>
-              <a:spcAft>
-                <a:spcPts val="0"/>
-              </a:spcAft>
-              <a:buNone/>
-            </a:pPr>
-            <a:endParaRPr/>
-          </a:p>
-        </p:txBody>
-      </p:sp>
-    </p:spTree>
-    <p:extLst>
-      <p:ext uri="{BB962C8B-B14F-4D97-AF65-F5344CB8AC3E}">
-        <p14:creationId xmlns:p14="http://schemas.microsoft.com/office/powerpoint/2010/main" val="4196729049"/>
       </p:ext>
     </p:extLst>
   </p:cSld>
@@ -7104,6 +7744,786 @@
   <p:cSld>
     <p:spTree>
       <p:nvGrpSpPr>
+        <p:cNvPr id="1" name="Shape 67">
+          <a:extLst>
+            <a:ext uri="{FF2B5EF4-FFF2-40B4-BE49-F238E27FC236}">
+              <a16:creationId xmlns:a16="http://schemas.microsoft.com/office/drawing/2014/main" id="{A1C8D446-D947-292E-2B9D-1B0C196E8524}"/>
+            </a:ext>
+          </a:extLst>
+        </p:cNvPr>
+        <p:cNvGrpSpPr/>
+        <p:nvPr/>
+      </p:nvGrpSpPr>
+      <p:grpSpPr>
+        <a:xfrm>
+          <a:off x="0" y="0"/>
+          <a:ext cx="0" cy="0"/>
+          <a:chOff x="0" y="0"/>
+          <a:chExt cx="0" cy="0"/>
+        </a:xfrm>
+      </p:grpSpPr>
+      <p:sp>
+        <p:nvSpPr>
+          <p:cNvPr id="68" name="Google Shape;68;p15">
+            <a:extLst>
+              <a:ext uri="{FF2B5EF4-FFF2-40B4-BE49-F238E27FC236}">
+                <a16:creationId xmlns:a16="http://schemas.microsoft.com/office/drawing/2014/main" id="{4E0D2F87-FD5F-4313-71FB-B75C20002AC3}"/>
+              </a:ext>
+            </a:extLst>
+          </p:cNvPr>
+          <p:cNvSpPr txBox="1">
+            <a:spLocks noGrp="1"/>
+          </p:cNvSpPr>
+          <p:nvPr>
+            <p:ph type="title"/>
+          </p:nvPr>
+        </p:nvSpPr>
+        <p:spPr>
+          <a:xfrm>
+            <a:off x="311700" y="445025"/>
+            <a:ext cx="8520600" cy="572700"/>
+          </a:xfrm>
+          <a:prstGeom prst="rect">
+            <a:avLst/>
+          </a:prstGeom>
+        </p:spPr>
+        <p:txBody>
+          <a:bodyPr spcFirstLastPara="1" wrap="square" lIns="91425" tIns="91425" rIns="91425" bIns="91425" anchor="t" anchorCtr="0">
+            <a:noAutofit/>
+          </a:bodyPr>
+          <a:lstStyle/>
+          <a:p>
+            <a:pPr marL="0" lvl="0" indent="0" algn="l" rtl="0">
+              <a:spcBef>
+                <a:spcPts val="0"/>
+              </a:spcBef>
+              <a:spcAft>
+                <a:spcPts val="0"/>
+              </a:spcAft>
+              <a:buNone/>
+            </a:pPr>
+            <a:r>
+              <a:rPr lang="en"/>
+              <a:t>Design and Mockups</a:t>
+            </a:r>
+            <a:endParaRPr/>
+          </a:p>
+        </p:txBody>
+      </p:sp>
+      <p:pic>
+        <p:nvPicPr>
+          <p:cNvPr id="4" name="Picture 3">
+            <a:extLst>
+              <a:ext uri="{FF2B5EF4-FFF2-40B4-BE49-F238E27FC236}">
+                <a16:creationId xmlns:a16="http://schemas.microsoft.com/office/drawing/2014/main" id="{C92473CF-BA37-5252-16CF-6FDA569C46CB}"/>
+              </a:ext>
+            </a:extLst>
+          </p:cNvPr>
+          <p:cNvPicPr>
+            <a:picLocks noChangeAspect="1"/>
+          </p:cNvPicPr>
+          <p:nvPr/>
+        </p:nvPicPr>
+        <p:blipFill>
+          <a:blip r:embed="rId3"/>
+          <a:stretch>
+            <a:fillRect/>
+          </a:stretch>
+        </p:blipFill>
+        <p:spPr>
+          <a:xfrm>
+            <a:off x="1995128" y="1017725"/>
+            <a:ext cx="5153744" cy="3334215"/>
+          </a:xfrm>
+          <a:prstGeom prst="rect">
+            <a:avLst/>
+          </a:prstGeom>
+        </p:spPr>
+      </p:pic>
+    </p:spTree>
+    <p:extLst>
+      <p:ext uri="{BB962C8B-B14F-4D97-AF65-F5344CB8AC3E}">
+        <p14:creationId xmlns:p14="http://schemas.microsoft.com/office/powerpoint/2010/main" val="3020420484"/>
+      </p:ext>
+    </p:extLst>
+  </p:cSld>
+  <p:clrMapOvr>
+    <a:masterClrMapping/>
+  </p:clrMapOvr>
+</p:sld>
+</file>
+
+<file path=ppt/slides/slide11.xml><?xml version="1.0" encoding="utf-8"?>
+<p:sld xmlns:a="http://schemas.openxmlformats.org/drawingml/2006/main" xmlns:r="http://schemas.openxmlformats.org/officeDocument/2006/relationships" xmlns:p="http://schemas.openxmlformats.org/presentationml/2006/main">
+  <p:cSld>
+    <p:spTree>
+      <p:nvGrpSpPr>
+        <p:cNvPr id="1" name="Shape 67">
+          <a:extLst>
+            <a:ext uri="{FF2B5EF4-FFF2-40B4-BE49-F238E27FC236}">
+              <a16:creationId xmlns:a16="http://schemas.microsoft.com/office/drawing/2014/main" id="{12F27822-F032-6FE9-0125-303E65B25BB8}"/>
+            </a:ext>
+          </a:extLst>
+        </p:cNvPr>
+        <p:cNvGrpSpPr/>
+        <p:nvPr/>
+      </p:nvGrpSpPr>
+      <p:grpSpPr>
+        <a:xfrm>
+          <a:off x="0" y="0"/>
+          <a:ext cx="0" cy="0"/>
+          <a:chOff x="0" y="0"/>
+          <a:chExt cx="0" cy="0"/>
+        </a:xfrm>
+      </p:grpSpPr>
+      <p:sp>
+        <p:nvSpPr>
+          <p:cNvPr id="68" name="Google Shape;68;p15">
+            <a:extLst>
+              <a:ext uri="{FF2B5EF4-FFF2-40B4-BE49-F238E27FC236}">
+                <a16:creationId xmlns:a16="http://schemas.microsoft.com/office/drawing/2014/main" id="{850F9874-8CF1-4E49-14C2-8B37FF88640E}"/>
+              </a:ext>
+            </a:extLst>
+          </p:cNvPr>
+          <p:cNvSpPr txBox="1">
+            <a:spLocks noGrp="1"/>
+          </p:cNvSpPr>
+          <p:nvPr>
+            <p:ph type="title"/>
+          </p:nvPr>
+        </p:nvSpPr>
+        <p:spPr>
+          <a:xfrm>
+            <a:off x="311700" y="445025"/>
+            <a:ext cx="8520600" cy="572700"/>
+          </a:xfrm>
+          <a:prstGeom prst="rect">
+            <a:avLst/>
+          </a:prstGeom>
+        </p:spPr>
+        <p:txBody>
+          <a:bodyPr spcFirstLastPara="1" wrap="square" lIns="91425" tIns="91425" rIns="91425" bIns="91425" anchor="t" anchorCtr="0">
+            <a:noAutofit/>
+          </a:bodyPr>
+          <a:lstStyle/>
+          <a:p>
+            <a:pPr marL="0" lvl="0" indent="0" algn="l" rtl="0">
+              <a:spcBef>
+                <a:spcPts val="0"/>
+              </a:spcBef>
+              <a:spcAft>
+                <a:spcPts val="0"/>
+              </a:spcAft>
+              <a:buNone/>
+            </a:pPr>
+            <a:r>
+              <a:rPr lang="en"/>
+              <a:t>Design and Mockups</a:t>
+            </a:r>
+            <a:endParaRPr/>
+          </a:p>
+        </p:txBody>
+      </p:sp>
+      <p:pic>
+        <p:nvPicPr>
+          <p:cNvPr id="3" name="Picture 2">
+            <a:extLst>
+              <a:ext uri="{FF2B5EF4-FFF2-40B4-BE49-F238E27FC236}">
+                <a16:creationId xmlns:a16="http://schemas.microsoft.com/office/drawing/2014/main" id="{9CAEB2C9-4CD8-DD67-63FB-70CA07BBC660}"/>
+              </a:ext>
+            </a:extLst>
+          </p:cNvPr>
+          <p:cNvPicPr>
+            <a:picLocks noChangeAspect="1"/>
+          </p:cNvPicPr>
+          <p:nvPr/>
+        </p:nvPicPr>
+        <p:blipFill>
+          <a:blip r:embed="rId3"/>
+          <a:stretch>
+            <a:fillRect/>
+          </a:stretch>
+        </p:blipFill>
+        <p:spPr>
+          <a:xfrm>
+            <a:off x="1353312" y="1017725"/>
+            <a:ext cx="6212095" cy="4120541"/>
+          </a:xfrm>
+          <a:prstGeom prst="rect">
+            <a:avLst/>
+          </a:prstGeom>
+        </p:spPr>
+      </p:pic>
+    </p:spTree>
+    <p:extLst>
+      <p:ext uri="{BB962C8B-B14F-4D97-AF65-F5344CB8AC3E}">
+        <p14:creationId xmlns:p14="http://schemas.microsoft.com/office/powerpoint/2010/main" val="972308140"/>
+      </p:ext>
+    </p:extLst>
+  </p:cSld>
+  <p:clrMapOvr>
+    <a:masterClrMapping/>
+  </p:clrMapOvr>
+</p:sld>
+</file>
+
+<file path=ppt/slides/slide12.xml><?xml version="1.0" encoding="utf-8"?>
+<p:sld xmlns:a="http://schemas.openxmlformats.org/drawingml/2006/main" xmlns:r="http://schemas.openxmlformats.org/officeDocument/2006/relationships" xmlns:p="http://schemas.openxmlformats.org/presentationml/2006/main">
+  <p:cSld>
+    <p:spTree>
+      <p:nvGrpSpPr>
+        <p:cNvPr id="1" name="Shape 67">
+          <a:extLst>
+            <a:ext uri="{FF2B5EF4-FFF2-40B4-BE49-F238E27FC236}">
+              <a16:creationId xmlns:a16="http://schemas.microsoft.com/office/drawing/2014/main" id="{474248D7-F55E-A56D-A86A-50284499EA1C}"/>
+            </a:ext>
+          </a:extLst>
+        </p:cNvPr>
+        <p:cNvGrpSpPr/>
+        <p:nvPr/>
+      </p:nvGrpSpPr>
+      <p:grpSpPr>
+        <a:xfrm>
+          <a:off x="0" y="0"/>
+          <a:ext cx="0" cy="0"/>
+          <a:chOff x="0" y="0"/>
+          <a:chExt cx="0" cy="0"/>
+        </a:xfrm>
+      </p:grpSpPr>
+      <p:sp>
+        <p:nvSpPr>
+          <p:cNvPr id="68" name="Google Shape;68;p15">
+            <a:extLst>
+              <a:ext uri="{FF2B5EF4-FFF2-40B4-BE49-F238E27FC236}">
+                <a16:creationId xmlns:a16="http://schemas.microsoft.com/office/drawing/2014/main" id="{C11A44D4-504A-DF73-0760-AAE71BBD86CC}"/>
+              </a:ext>
+            </a:extLst>
+          </p:cNvPr>
+          <p:cNvSpPr txBox="1">
+            <a:spLocks noGrp="1"/>
+          </p:cNvSpPr>
+          <p:nvPr>
+            <p:ph type="title"/>
+          </p:nvPr>
+        </p:nvSpPr>
+        <p:spPr>
+          <a:xfrm>
+            <a:off x="311700" y="445025"/>
+            <a:ext cx="8520600" cy="572700"/>
+          </a:xfrm>
+          <a:prstGeom prst="rect">
+            <a:avLst/>
+          </a:prstGeom>
+        </p:spPr>
+        <p:txBody>
+          <a:bodyPr spcFirstLastPara="1" wrap="square" lIns="91425" tIns="91425" rIns="91425" bIns="91425" anchor="t" anchorCtr="0">
+            <a:noAutofit/>
+          </a:bodyPr>
+          <a:lstStyle/>
+          <a:p>
+            <a:pPr marL="0" lvl="0" indent="0" algn="l" rtl="0">
+              <a:spcBef>
+                <a:spcPts val="0"/>
+              </a:spcBef>
+              <a:spcAft>
+                <a:spcPts val="0"/>
+              </a:spcAft>
+              <a:buNone/>
+            </a:pPr>
+            <a:r>
+              <a:rPr lang="en"/>
+              <a:t>Design and Mockups</a:t>
+            </a:r>
+            <a:endParaRPr/>
+          </a:p>
+        </p:txBody>
+      </p:sp>
+      <p:pic>
+        <p:nvPicPr>
+          <p:cNvPr id="4" name="Picture 3">
+            <a:extLst>
+              <a:ext uri="{FF2B5EF4-FFF2-40B4-BE49-F238E27FC236}">
+                <a16:creationId xmlns:a16="http://schemas.microsoft.com/office/drawing/2014/main" id="{BE8FF8E8-DCC8-1E7F-1025-9D230C8CD790}"/>
+              </a:ext>
+            </a:extLst>
+          </p:cNvPr>
+          <p:cNvPicPr>
+            <a:picLocks noChangeAspect="1"/>
+          </p:cNvPicPr>
+          <p:nvPr/>
+        </p:nvPicPr>
+        <p:blipFill>
+          <a:blip r:embed="rId3"/>
+          <a:stretch>
+            <a:fillRect/>
+          </a:stretch>
+        </p:blipFill>
+        <p:spPr>
+          <a:xfrm>
+            <a:off x="1634455" y="1017725"/>
+            <a:ext cx="5875089" cy="3890730"/>
+          </a:xfrm>
+          <a:prstGeom prst="rect">
+            <a:avLst/>
+          </a:prstGeom>
+        </p:spPr>
+      </p:pic>
+    </p:spTree>
+    <p:extLst>
+      <p:ext uri="{BB962C8B-B14F-4D97-AF65-F5344CB8AC3E}">
+        <p14:creationId xmlns:p14="http://schemas.microsoft.com/office/powerpoint/2010/main" val="2845261414"/>
+      </p:ext>
+    </p:extLst>
+  </p:cSld>
+  <p:clrMapOvr>
+    <a:masterClrMapping/>
+  </p:clrMapOvr>
+</p:sld>
+</file>
+
+<file path=ppt/slides/slide13.xml><?xml version="1.0" encoding="utf-8"?>
+<p:sld xmlns:a="http://schemas.openxmlformats.org/drawingml/2006/main" xmlns:r="http://schemas.openxmlformats.org/officeDocument/2006/relationships" xmlns:p="http://schemas.openxmlformats.org/presentationml/2006/main">
+  <p:cSld>
+    <p:spTree>
+      <p:nvGrpSpPr>
+        <p:cNvPr id="1" name="Shape 72"/>
+        <p:cNvGrpSpPr/>
+        <p:nvPr/>
+      </p:nvGrpSpPr>
+      <p:grpSpPr>
+        <a:xfrm>
+          <a:off x="0" y="0"/>
+          <a:ext cx="0" cy="0"/>
+          <a:chOff x="0" y="0"/>
+          <a:chExt cx="0" cy="0"/>
+        </a:xfrm>
+      </p:grpSpPr>
+      <p:sp>
+        <p:nvSpPr>
+          <p:cNvPr id="73" name="Google Shape;73;p16"/>
+          <p:cNvSpPr txBox="1">
+            <a:spLocks noGrp="1"/>
+          </p:cNvSpPr>
+          <p:nvPr>
+            <p:ph type="title"/>
+          </p:nvPr>
+        </p:nvSpPr>
+        <p:spPr>
+          <a:xfrm>
+            <a:off x="311700" y="445025"/>
+            <a:ext cx="8520600" cy="572700"/>
+          </a:xfrm>
+          <a:prstGeom prst="rect">
+            <a:avLst/>
+          </a:prstGeom>
+        </p:spPr>
+        <p:txBody>
+          <a:bodyPr spcFirstLastPara="1" wrap="square" lIns="91425" tIns="91425" rIns="91425" bIns="91425" anchor="t" anchorCtr="0">
+            <a:noAutofit/>
+          </a:bodyPr>
+          <a:lstStyle/>
+          <a:p>
+            <a:pPr marL="0" lvl="0" indent="0" algn="l" rtl="0">
+              <a:spcBef>
+                <a:spcPts val="0"/>
+              </a:spcBef>
+              <a:spcAft>
+                <a:spcPts val="0"/>
+              </a:spcAft>
+              <a:buNone/>
+            </a:pPr>
+            <a:r>
+              <a:rPr lang="en"/>
+              <a:t>Technologies used</a:t>
+            </a:r>
+            <a:endParaRPr/>
+          </a:p>
+        </p:txBody>
+      </p:sp>
+      <p:sp>
+        <p:nvSpPr>
+          <p:cNvPr id="74" name="Google Shape;74;p16"/>
+          <p:cNvSpPr txBox="1">
+            <a:spLocks noGrp="1"/>
+          </p:cNvSpPr>
+          <p:nvPr>
+            <p:ph type="body" idx="1"/>
+          </p:nvPr>
+        </p:nvSpPr>
+        <p:spPr>
+          <a:xfrm>
+            <a:off x="311700" y="1152475"/>
+            <a:ext cx="8520600" cy="3416400"/>
+          </a:xfrm>
+          <a:prstGeom prst="rect">
+            <a:avLst/>
+          </a:prstGeom>
+        </p:spPr>
+        <p:txBody>
+          <a:bodyPr spcFirstLastPara="1" wrap="square" lIns="91425" tIns="91425" rIns="91425" bIns="91425" anchor="t" anchorCtr="0">
+            <a:noAutofit/>
+          </a:bodyPr>
+          <a:lstStyle/>
+          <a:p>
+            <a:pPr marL="0" lvl="0" indent="0" algn="l" rtl="0">
+              <a:spcBef>
+                <a:spcPts val="0"/>
+              </a:spcBef>
+              <a:spcAft>
+                <a:spcPts val="1600"/>
+              </a:spcAft>
+              <a:buNone/>
+            </a:pPr>
+            <a:r>
+              <a:rPr lang="en-IN" dirty="0"/>
+              <a:t>Node.js + Express (REST API backend)</a:t>
+            </a:r>
+          </a:p>
+          <a:p>
+            <a:pPr marL="0" lvl="0" indent="0" algn="l" rtl="0">
+              <a:spcBef>
+                <a:spcPts val="0"/>
+              </a:spcBef>
+              <a:spcAft>
+                <a:spcPts val="1600"/>
+              </a:spcAft>
+              <a:buNone/>
+            </a:pPr>
+            <a:r>
+              <a:rPr lang="en-IN" dirty="0"/>
+              <a:t>MongoDB native driver (3 collections: habits, logs, goals)</a:t>
+            </a:r>
+          </a:p>
+          <a:p>
+            <a:pPr marL="0" lvl="0" indent="0" algn="l" rtl="0">
+              <a:spcBef>
+                <a:spcPts val="0"/>
+              </a:spcBef>
+              <a:spcAft>
+                <a:spcPts val="1600"/>
+              </a:spcAft>
+              <a:buNone/>
+            </a:pPr>
+            <a:r>
+              <a:rPr lang="en-IN" dirty="0"/>
+              <a:t>React 18 with </a:t>
+            </a:r>
+            <a:r>
+              <a:rPr lang="en-IN" dirty="0" err="1"/>
+              <a:t>Hools</a:t>
+            </a:r>
+            <a:r>
+              <a:rPr lang="en-IN" dirty="0"/>
+              <a:t> + React Router v6 (client-side rendering)</a:t>
+            </a:r>
+          </a:p>
+          <a:p>
+            <a:pPr marL="0" lvl="0" indent="0" algn="l" rtl="0">
+              <a:spcBef>
+                <a:spcPts val="0"/>
+              </a:spcBef>
+              <a:spcAft>
+                <a:spcPts val="1600"/>
+              </a:spcAft>
+              <a:buNone/>
+            </a:pPr>
+            <a:r>
+              <a:rPr lang="en-IN" dirty="0" err="1"/>
+              <a:t>ESLint</a:t>
+            </a:r>
+            <a:r>
+              <a:rPr lang="en-IN" dirty="0"/>
+              <a:t> + Prettier + Vite (build tool) + </a:t>
+            </a:r>
+            <a:r>
+              <a:rPr lang="en-IN" dirty="0" err="1"/>
+              <a:t>PropTypes</a:t>
+            </a:r>
+            <a:endParaRPr lang="en-IN" dirty="0"/>
+          </a:p>
+          <a:p>
+            <a:pPr marL="0" lvl="0" indent="0" algn="l" rtl="0">
+              <a:spcBef>
+                <a:spcPts val="0"/>
+              </a:spcBef>
+              <a:spcAft>
+                <a:spcPts val="1600"/>
+              </a:spcAft>
+              <a:buNone/>
+            </a:pPr>
+            <a:r>
+              <a:rPr lang="en-IN" dirty="0"/>
+              <a:t>Deployed on Render (backend Web Service + frontend Static Site)</a:t>
+            </a:r>
+          </a:p>
+          <a:p>
+            <a:pPr marL="0" lvl="0" indent="0" algn="l" rtl="0">
+              <a:spcBef>
+                <a:spcPts val="0"/>
+              </a:spcBef>
+              <a:spcAft>
+                <a:spcPts val="1600"/>
+              </a:spcAft>
+              <a:buNone/>
+            </a:pPr>
+            <a:r>
+              <a:rPr lang="en-IN" dirty="0"/>
+              <a:t>Passport.js + </a:t>
+            </a:r>
+            <a:r>
+              <a:rPr lang="en-IN" dirty="0" err="1"/>
+              <a:t>bcrypt</a:t>
+            </a:r>
+            <a:r>
+              <a:rPr lang="en-IN" dirty="0"/>
+              <a:t> + express-session (authentication)</a:t>
+            </a:r>
+          </a:p>
+          <a:p>
+            <a:pPr marL="0" lvl="0" indent="0" algn="l" rtl="0">
+              <a:spcBef>
+                <a:spcPts val="0"/>
+              </a:spcBef>
+              <a:spcAft>
+                <a:spcPts val="1600"/>
+              </a:spcAft>
+              <a:buNone/>
+            </a:pPr>
+            <a:r>
+              <a:rPr lang="en-IN" dirty="0"/>
+              <a:t>Syne + DM Sans (typography pairing)</a:t>
+            </a:r>
+            <a:endParaRPr dirty="0"/>
+          </a:p>
+        </p:txBody>
+      </p:sp>
+    </p:spTree>
+  </p:cSld>
+  <p:clrMapOvr>
+    <a:masterClrMapping/>
+  </p:clrMapOvr>
+</p:sld>
+</file>
+
+<file path=ppt/slides/slide14.xml><?xml version="1.0" encoding="utf-8"?>
+<p:sld xmlns:a="http://schemas.openxmlformats.org/drawingml/2006/main" xmlns:r="http://schemas.openxmlformats.org/officeDocument/2006/relationships" xmlns:p="http://schemas.openxmlformats.org/presentationml/2006/main">
+  <p:cSld>
+    <p:spTree>
+      <p:nvGrpSpPr>
+        <p:cNvPr id="1" name="Shape 72">
+          <a:extLst>
+            <a:ext uri="{FF2B5EF4-FFF2-40B4-BE49-F238E27FC236}">
+              <a16:creationId xmlns:a16="http://schemas.microsoft.com/office/drawing/2014/main" id="{3483CE52-5F58-2B5C-1F57-63F356C8C09D}"/>
+            </a:ext>
+          </a:extLst>
+        </p:cNvPr>
+        <p:cNvGrpSpPr/>
+        <p:nvPr/>
+      </p:nvGrpSpPr>
+      <p:grpSpPr>
+        <a:xfrm>
+          <a:off x="0" y="0"/>
+          <a:ext cx="0" cy="0"/>
+          <a:chOff x="0" y="0"/>
+          <a:chExt cx="0" cy="0"/>
+        </a:xfrm>
+      </p:grpSpPr>
+      <p:sp>
+        <p:nvSpPr>
+          <p:cNvPr id="73" name="Google Shape;73;p16">
+            <a:extLst>
+              <a:ext uri="{FF2B5EF4-FFF2-40B4-BE49-F238E27FC236}">
+                <a16:creationId xmlns:a16="http://schemas.microsoft.com/office/drawing/2014/main" id="{0AA5E858-CD0C-6F3C-99DE-7C2DA183AFA4}"/>
+              </a:ext>
+            </a:extLst>
+          </p:cNvPr>
+          <p:cNvSpPr txBox="1">
+            <a:spLocks noGrp="1"/>
+          </p:cNvSpPr>
+          <p:nvPr>
+            <p:ph type="title"/>
+          </p:nvPr>
+        </p:nvSpPr>
+        <p:spPr>
+          <a:xfrm>
+            <a:off x="311700" y="445025"/>
+            <a:ext cx="8520600" cy="572700"/>
+          </a:xfrm>
+          <a:prstGeom prst="rect">
+            <a:avLst/>
+          </a:prstGeom>
+        </p:spPr>
+        <p:txBody>
+          <a:bodyPr spcFirstLastPara="1" wrap="square" lIns="91425" tIns="91425" rIns="91425" bIns="91425" anchor="t" anchorCtr="0">
+            <a:noAutofit/>
+          </a:bodyPr>
+          <a:lstStyle/>
+          <a:p>
+            <a:pPr marL="0" lvl="0" indent="0" algn="l" rtl="0">
+              <a:spcBef>
+                <a:spcPts val="0"/>
+              </a:spcBef>
+              <a:spcAft>
+                <a:spcPts val="0"/>
+              </a:spcAft>
+              <a:buNone/>
+            </a:pPr>
+            <a:r>
+              <a:rPr lang="en-US" dirty="0"/>
+              <a:t>What Makes This Project Different?</a:t>
+            </a:r>
+            <a:endParaRPr dirty="0"/>
+          </a:p>
+        </p:txBody>
+      </p:sp>
+      <p:sp>
+        <p:nvSpPr>
+          <p:cNvPr id="74" name="Google Shape;74;p16">
+            <a:extLst>
+              <a:ext uri="{FF2B5EF4-FFF2-40B4-BE49-F238E27FC236}">
+                <a16:creationId xmlns:a16="http://schemas.microsoft.com/office/drawing/2014/main" id="{85CC995F-BB81-4BC6-9A27-DF1F2A5FFEE0}"/>
+              </a:ext>
+            </a:extLst>
+          </p:cNvPr>
+          <p:cNvSpPr txBox="1">
+            <a:spLocks noGrp="1"/>
+          </p:cNvSpPr>
+          <p:nvPr>
+            <p:ph type="body" idx="1"/>
+          </p:nvPr>
+        </p:nvSpPr>
+        <p:spPr>
+          <a:xfrm>
+            <a:off x="311700" y="1152475"/>
+            <a:ext cx="8520600" cy="3416400"/>
+          </a:xfrm>
+          <a:prstGeom prst="rect">
+            <a:avLst/>
+          </a:prstGeom>
+        </p:spPr>
+        <p:txBody>
+          <a:bodyPr spcFirstLastPara="1" wrap="square" lIns="91425" tIns="91425" rIns="91425" bIns="91425" anchor="t" anchorCtr="0">
+            <a:noAutofit/>
+          </a:bodyPr>
+          <a:lstStyle/>
+          <a:p>
+            <a:pPr marL="0" lvl="0" indent="0" algn="l" rtl="0">
+              <a:spcBef>
+                <a:spcPts val="0"/>
+              </a:spcBef>
+              <a:spcAft>
+                <a:spcPts val="1600"/>
+              </a:spcAft>
+              <a:buNone/>
+            </a:pPr>
+            <a:r>
+              <a:rPr lang="en-US" dirty="0"/>
+              <a:t>Full analytics engine with streak calculation, weekly completion %, and date range filtering</a:t>
+            </a:r>
+          </a:p>
+          <a:p>
+            <a:pPr marL="0" lvl="0" indent="0" algn="l" rtl="0">
+              <a:spcBef>
+                <a:spcPts val="0"/>
+              </a:spcBef>
+              <a:spcAft>
+                <a:spcPts val="1600"/>
+              </a:spcAft>
+              <a:buNone/>
+            </a:pPr>
+            <a:r>
+              <a:rPr lang="en-US" dirty="0"/>
+              <a:t>3 MongoDB collections with full CRUD split between both team members</a:t>
+            </a:r>
+          </a:p>
+          <a:p>
+            <a:pPr marL="0" lvl="0" indent="0" algn="l" rtl="0">
+              <a:spcBef>
+                <a:spcPts val="0"/>
+              </a:spcBef>
+              <a:spcAft>
+                <a:spcPts val="1600"/>
+              </a:spcAft>
+              <a:buNone/>
+            </a:pPr>
+            <a:r>
+              <a:rPr lang="en-US" dirty="0"/>
+              <a:t>2046 synthetic records with realistic streak patterns, duplicate prevention and batch seeding</a:t>
+            </a:r>
+          </a:p>
+          <a:p>
+            <a:pPr marL="0" lvl="0" indent="0" algn="l" rtl="0">
+              <a:spcBef>
+                <a:spcPts val="0"/>
+              </a:spcBef>
+              <a:spcAft>
+                <a:spcPts val="1600"/>
+              </a:spcAft>
+              <a:buNone/>
+            </a:pPr>
+            <a:r>
+              <a:rPr lang="en-US" dirty="0"/>
+              <a:t>100% Lighthouse accessibility score across all pages</a:t>
+            </a:r>
+          </a:p>
+          <a:p>
+            <a:pPr marL="0" lvl="0" indent="0" algn="l" rtl="0">
+              <a:spcBef>
+                <a:spcPts val="0"/>
+              </a:spcBef>
+              <a:spcAft>
+                <a:spcPts val="1600"/>
+              </a:spcAft>
+              <a:buNone/>
+            </a:pPr>
+            <a:r>
+              <a:rPr lang="en-US" dirty="0"/>
+              <a:t>Full keyboard navigation with skip-to-content link and Escape key modal support</a:t>
+            </a:r>
+          </a:p>
+          <a:p>
+            <a:pPr marL="0" lvl="0" indent="0" algn="l" rtl="0">
+              <a:spcBef>
+                <a:spcPts val="0"/>
+              </a:spcBef>
+              <a:spcAft>
+                <a:spcPts val="1600"/>
+              </a:spcAft>
+              <a:buNone/>
+            </a:pPr>
+            <a:r>
+              <a:rPr lang="en-US" dirty="0"/>
+              <a:t>Usability study with 6 participants informed analytics filter improvements, google </a:t>
+            </a:r>
+            <a:r>
+              <a:rPr lang="en-US" dirty="0" err="1"/>
+              <a:t>sso</a:t>
+            </a:r>
+            <a:r>
+              <a:rPr lang="en-US" dirty="0"/>
+              <a:t>, and quick-fill log notes</a:t>
+            </a:r>
+          </a:p>
+        </p:txBody>
+      </p:sp>
+    </p:spTree>
+    <p:extLst>
+      <p:ext uri="{BB962C8B-B14F-4D97-AF65-F5344CB8AC3E}">
+        <p14:creationId xmlns:p14="http://schemas.microsoft.com/office/powerpoint/2010/main" val="490821702"/>
+      </p:ext>
+    </p:extLst>
+  </p:cSld>
+  <p:clrMapOvr>
+    <a:masterClrMapping/>
+  </p:clrMapOvr>
+</p:sld>
+</file>
+
+<file path=ppt/slides/slide15.xml><?xml version="1.0" encoding="utf-8"?>
+<p:sld xmlns:a="http://schemas.openxmlformats.org/drawingml/2006/main" xmlns:r="http://schemas.openxmlformats.org/officeDocument/2006/relationships" xmlns:p="http://schemas.openxmlformats.org/presentationml/2006/main">
+  <p:cSld>
+    <p:spTree>
+      <p:nvGrpSpPr>
         <p:cNvPr id="1" name="Shape 78"/>
         <p:cNvGrpSpPr/>
         <p:nvPr/>
@@ -7297,7 +8717,7 @@
 </p:sld>
 </file>
 
-<file path=ppt/slides/slide11.xml><?xml version="1.0" encoding="utf-8"?>
+<file path=ppt/slides/slide16.xml><?xml version="1.0" encoding="utf-8"?>
 <p:sld xmlns:a="http://schemas.openxmlformats.org/drawingml/2006/main" xmlns:r="http://schemas.openxmlformats.org/officeDocument/2006/relationships" xmlns:p="http://schemas.openxmlformats.org/presentationml/2006/main">
   <p:cSld>
     <p:spTree>
@@ -7462,7 +8882,7 @@
 </p:sld>
 </file>
 
-<file path=ppt/slides/slide12.xml><?xml version="1.0" encoding="utf-8"?>
+<file path=ppt/slides/slide17.xml><?xml version="1.0" encoding="utf-8"?>
 <p:sld xmlns:a="http://schemas.openxmlformats.org/drawingml/2006/main" xmlns:r="http://schemas.openxmlformats.org/officeDocument/2006/relationships" xmlns:p="http://schemas.openxmlformats.org/presentationml/2006/main">
   <p:cSld>
     <p:spTree>
@@ -7559,6 +8979,12 @@
               <a:rPr lang="en" dirty="0"/>
               <a:t>Project Demo Video - </a:t>
             </a:r>
+            <a:r>
+              <a:rPr lang="en-IN" dirty="0">
+                <a:hlinkClick r:id="rId3"/>
+              </a:rPr>
+              <a:t>https://youtu.be/UJ4qNQq3BXg</a:t>
+            </a:r>
             <a:endParaRPr lang="en-IN" dirty="0"/>
           </a:p>
           <a:p>
@@ -7589,7 +9015,7 @@
             </a:r>
             <a:r>
               <a:rPr lang="en-IN" dirty="0">
-                <a:hlinkClick r:id="rId3"/>
+                <a:hlinkClick r:id="rId4"/>
               </a:rPr>
               <a:t>https://github.com/aniketnandi/Habit-Forge/tree/final-project</a:t>
             </a:r>
@@ -7623,7 +9049,7 @@
             </a:r>
             <a:r>
               <a:rPr lang="en-IN" dirty="0">
-                <a:hlinkClick r:id="rId4"/>
+                <a:hlinkClick r:id="rId5"/>
               </a:rPr>
               <a:t>https://habit-forge-final-project.onrender.com</a:t>
             </a:r>
@@ -7639,7 +9065,7 @@
 </p:sld>
 </file>
 
-<file path=ppt/slides/slide13.xml><?xml version="1.0" encoding="utf-8"?>
+<file path=ppt/slides/slide18.xml><?xml version="1.0" encoding="utf-8"?>
 <p:sld xmlns:a="http://schemas.openxmlformats.org/drawingml/2006/main" xmlns:r="http://schemas.openxmlformats.org/officeDocument/2006/relationships" xmlns:p="http://schemas.openxmlformats.org/presentationml/2006/main">
   <p:cSld>
     <p:spTree>
@@ -7963,6 +9389,576 @@
   <p:cSld>
     <p:spTree>
       <p:nvGrpSpPr>
+        <p:cNvPr id="1" name="Shape 61">
+          <a:extLst>
+            <a:ext uri="{FF2B5EF4-FFF2-40B4-BE49-F238E27FC236}">
+              <a16:creationId xmlns:a16="http://schemas.microsoft.com/office/drawing/2014/main" id="{1973A4CB-DCBC-0B32-8462-9899C7BB7FA9}"/>
+            </a:ext>
+          </a:extLst>
+        </p:cNvPr>
+        <p:cNvGrpSpPr/>
+        <p:nvPr/>
+      </p:nvGrpSpPr>
+      <p:grpSpPr>
+        <a:xfrm>
+          <a:off x="0" y="0"/>
+          <a:ext cx="0" cy="0"/>
+          <a:chOff x="0" y="0"/>
+          <a:chExt cx="0" cy="0"/>
+        </a:xfrm>
+      </p:grpSpPr>
+      <p:sp>
+        <p:nvSpPr>
+          <p:cNvPr id="62" name="Google Shape;62;p14">
+            <a:extLst>
+              <a:ext uri="{FF2B5EF4-FFF2-40B4-BE49-F238E27FC236}">
+                <a16:creationId xmlns:a16="http://schemas.microsoft.com/office/drawing/2014/main" id="{5EE2EAE7-BBE7-37E6-F857-D3DB0A6A2A71}"/>
+              </a:ext>
+            </a:extLst>
+          </p:cNvPr>
+          <p:cNvSpPr txBox="1">
+            <a:spLocks noGrp="1"/>
+          </p:cNvSpPr>
+          <p:nvPr>
+            <p:ph type="title"/>
+          </p:nvPr>
+        </p:nvSpPr>
+        <p:spPr>
+          <a:xfrm>
+            <a:off x="311700" y="445025"/>
+            <a:ext cx="8520600" cy="572700"/>
+          </a:xfrm>
+          <a:prstGeom prst="rect">
+            <a:avLst/>
+          </a:prstGeom>
+        </p:spPr>
+        <p:txBody>
+          <a:bodyPr spcFirstLastPara="1" wrap="square" lIns="91425" tIns="91425" rIns="91425" bIns="91425" anchor="t" anchorCtr="0">
+            <a:noAutofit/>
+          </a:bodyPr>
+          <a:lstStyle/>
+          <a:p>
+            <a:pPr marL="0" lvl="0" indent="0" algn="l" rtl="0">
+              <a:spcBef>
+                <a:spcPts val="0"/>
+              </a:spcBef>
+              <a:spcAft>
+                <a:spcPts val="0"/>
+              </a:spcAft>
+              <a:buNone/>
+            </a:pPr>
+            <a:r>
+              <a:rPr lang="en" dirty="0"/>
+              <a:t>Lighthouse Report Dashboard</a:t>
+            </a:r>
+            <a:endParaRPr dirty="0"/>
+          </a:p>
+        </p:txBody>
+      </p:sp>
+      <p:pic>
+        <p:nvPicPr>
+          <p:cNvPr id="3" name="Picture 2">
+            <a:extLst>
+              <a:ext uri="{FF2B5EF4-FFF2-40B4-BE49-F238E27FC236}">
+                <a16:creationId xmlns:a16="http://schemas.microsoft.com/office/drawing/2014/main" id="{37482E83-A24C-DDE8-112F-CA9D199E109E}"/>
+              </a:ext>
+            </a:extLst>
+          </p:cNvPr>
+          <p:cNvPicPr>
+            <a:picLocks noChangeAspect="1"/>
+          </p:cNvPicPr>
+          <p:nvPr/>
+        </p:nvPicPr>
+        <p:blipFill>
+          <a:blip r:embed="rId3"/>
+          <a:stretch>
+            <a:fillRect/>
+          </a:stretch>
+        </p:blipFill>
+        <p:spPr>
+          <a:xfrm>
+            <a:off x="676507" y="1085926"/>
+            <a:ext cx="7790985" cy="3549497"/>
+          </a:xfrm>
+          <a:prstGeom prst="rect">
+            <a:avLst/>
+          </a:prstGeom>
+        </p:spPr>
+      </p:pic>
+    </p:spTree>
+    <p:extLst>
+      <p:ext uri="{BB962C8B-B14F-4D97-AF65-F5344CB8AC3E}">
+        <p14:creationId xmlns:p14="http://schemas.microsoft.com/office/powerpoint/2010/main" val="4248704013"/>
+      </p:ext>
+    </p:extLst>
+  </p:cSld>
+  <p:clrMapOvr>
+    <a:masterClrMapping/>
+  </p:clrMapOvr>
+</p:sld>
+</file>
+
+<file path=ppt/slides/slide4.xml><?xml version="1.0" encoding="utf-8"?>
+<p:sld xmlns:a="http://schemas.openxmlformats.org/drawingml/2006/main" xmlns:r="http://schemas.openxmlformats.org/officeDocument/2006/relationships" xmlns:p="http://schemas.openxmlformats.org/presentationml/2006/main">
+  <p:cSld>
+    <p:spTree>
+      <p:nvGrpSpPr>
+        <p:cNvPr id="1" name="Shape 61">
+          <a:extLst>
+            <a:ext uri="{FF2B5EF4-FFF2-40B4-BE49-F238E27FC236}">
+              <a16:creationId xmlns:a16="http://schemas.microsoft.com/office/drawing/2014/main" id="{DD5A7EC9-BDD7-8D52-B8AF-9E9E34F6232C}"/>
+            </a:ext>
+          </a:extLst>
+        </p:cNvPr>
+        <p:cNvGrpSpPr/>
+        <p:nvPr/>
+      </p:nvGrpSpPr>
+      <p:grpSpPr>
+        <a:xfrm>
+          <a:off x="0" y="0"/>
+          <a:ext cx="0" cy="0"/>
+          <a:chOff x="0" y="0"/>
+          <a:chExt cx="0" cy="0"/>
+        </a:xfrm>
+      </p:grpSpPr>
+      <p:sp>
+        <p:nvSpPr>
+          <p:cNvPr id="62" name="Google Shape;62;p14">
+            <a:extLst>
+              <a:ext uri="{FF2B5EF4-FFF2-40B4-BE49-F238E27FC236}">
+                <a16:creationId xmlns:a16="http://schemas.microsoft.com/office/drawing/2014/main" id="{48948BF9-9033-F082-65DF-F5FFF300D921}"/>
+              </a:ext>
+            </a:extLst>
+          </p:cNvPr>
+          <p:cNvSpPr txBox="1">
+            <a:spLocks noGrp="1"/>
+          </p:cNvSpPr>
+          <p:nvPr>
+            <p:ph type="title"/>
+          </p:nvPr>
+        </p:nvSpPr>
+        <p:spPr>
+          <a:xfrm>
+            <a:off x="311700" y="445025"/>
+            <a:ext cx="8520600" cy="572700"/>
+          </a:xfrm>
+          <a:prstGeom prst="rect">
+            <a:avLst/>
+          </a:prstGeom>
+        </p:spPr>
+        <p:txBody>
+          <a:bodyPr spcFirstLastPara="1" wrap="square" lIns="91425" tIns="91425" rIns="91425" bIns="91425" anchor="t" anchorCtr="0">
+            <a:noAutofit/>
+          </a:bodyPr>
+          <a:lstStyle/>
+          <a:p>
+            <a:pPr marL="0" lvl="0" indent="0" algn="l" rtl="0">
+              <a:spcBef>
+                <a:spcPts val="0"/>
+              </a:spcBef>
+              <a:spcAft>
+                <a:spcPts val="0"/>
+              </a:spcAft>
+              <a:buNone/>
+            </a:pPr>
+            <a:r>
+              <a:rPr lang="en" dirty="0"/>
+              <a:t>Lighthouse Report Analytics</a:t>
+            </a:r>
+            <a:endParaRPr dirty="0"/>
+          </a:p>
+        </p:txBody>
+      </p:sp>
+      <p:pic>
+        <p:nvPicPr>
+          <p:cNvPr id="4" name="Picture 3">
+            <a:extLst>
+              <a:ext uri="{FF2B5EF4-FFF2-40B4-BE49-F238E27FC236}">
+                <a16:creationId xmlns:a16="http://schemas.microsoft.com/office/drawing/2014/main" id="{552CBF4F-0783-33E3-CF72-A45D71827628}"/>
+              </a:ext>
+            </a:extLst>
+          </p:cNvPr>
+          <p:cNvPicPr>
+            <a:picLocks noChangeAspect="1"/>
+          </p:cNvPicPr>
+          <p:nvPr/>
+        </p:nvPicPr>
+        <p:blipFill>
+          <a:blip r:embed="rId3"/>
+          <a:stretch>
+            <a:fillRect/>
+          </a:stretch>
+        </p:blipFill>
+        <p:spPr>
+          <a:xfrm>
+            <a:off x="494370" y="1131241"/>
+            <a:ext cx="8155259" cy="3735332"/>
+          </a:xfrm>
+          <a:prstGeom prst="rect">
+            <a:avLst/>
+          </a:prstGeom>
+        </p:spPr>
+      </p:pic>
+    </p:spTree>
+    <p:extLst>
+      <p:ext uri="{BB962C8B-B14F-4D97-AF65-F5344CB8AC3E}">
+        <p14:creationId xmlns:p14="http://schemas.microsoft.com/office/powerpoint/2010/main" val="1037905529"/>
+      </p:ext>
+    </p:extLst>
+  </p:cSld>
+  <p:clrMapOvr>
+    <a:masterClrMapping/>
+  </p:clrMapOvr>
+</p:sld>
+</file>
+
+<file path=ppt/slides/slide5.xml><?xml version="1.0" encoding="utf-8"?>
+<p:sld xmlns:a="http://schemas.openxmlformats.org/drawingml/2006/main" xmlns:r="http://schemas.openxmlformats.org/officeDocument/2006/relationships" xmlns:p="http://schemas.openxmlformats.org/presentationml/2006/main">
+  <p:cSld>
+    <p:spTree>
+      <p:nvGrpSpPr>
+        <p:cNvPr id="1" name="Shape 61">
+          <a:extLst>
+            <a:ext uri="{FF2B5EF4-FFF2-40B4-BE49-F238E27FC236}">
+              <a16:creationId xmlns:a16="http://schemas.microsoft.com/office/drawing/2014/main" id="{DCF9890A-B359-CCD3-A088-9753AB834F79}"/>
+            </a:ext>
+          </a:extLst>
+        </p:cNvPr>
+        <p:cNvGrpSpPr/>
+        <p:nvPr/>
+      </p:nvGrpSpPr>
+      <p:grpSpPr>
+        <a:xfrm>
+          <a:off x="0" y="0"/>
+          <a:ext cx="0" cy="0"/>
+          <a:chOff x="0" y="0"/>
+          <a:chExt cx="0" cy="0"/>
+        </a:xfrm>
+      </p:grpSpPr>
+      <p:sp>
+        <p:nvSpPr>
+          <p:cNvPr id="62" name="Google Shape;62;p14">
+            <a:extLst>
+              <a:ext uri="{FF2B5EF4-FFF2-40B4-BE49-F238E27FC236}">
+                <a16:creationId xmlns:a16="http://schemas.microsoft.com/office/drawing/2014/main" id="{B0492359-545A-84DD-5D24-8AF99B88584A}"/>
+              </a:ext>
+            </a:extLst>
+          </p:cNvPr>
+          <p:cNvSpPr txBox="1">
+            <a:spLocks noGrp="1"/>
+          </p:cNvSpPr>
+          <p:nvPr>
+            <p:ph type="title"/>
+          </p:nvPr>
+        </p:nvSpPr>
+        <p:spPr>
+          <a:xfrm>
+            <a:off x="311700" y="445025"/>
+            <a:ext cx="8520600" cy="572700"/>
+          </a:xfrm>
+          <a:prstGeom prst="rect">
+            <a:avLst/>
+          </a:prstGeom>
+        </p:spPr>
+        <p:txBody>
+          <a:bodyPr spcFirstLastPara="1" wrap="square" lIns="91425" tIns="91425" rIns="91425" bIns="91425" anchor="t" anchorCtr="0">
+            <a:noAutofit/>
+          </a:bodyPr>
+          <a:lstStyle/>
+          <a:p>
+            <a:pPr marL="0" lvl="0" indent="0" algn="l" rtl="0">
+              <a:spcBef>
+                <a:spcPts val="0"/>
+              </a:spcBef>
+              <a:spcAft>
+                <a:spcPts val="0"/>
+              </a:spcAft>
+              <a:buNone/>
+            </a:pPr>
+            <a:r>
+              <a:rPr lang="en" dirty="0"/>
+              <a:t>Lighthouse Report Log View</a:t>
+            </a:r>
+            <a:endParaRPr dirty="0"/>
+          </a:p>
+        </p:txBody>
+      </p:sp>
+      <p:pic>
+        <p:nvPicPr>
+          <p:cNvPr id="3" name="Picture 2">
+            <a:extLst>
+              <a:ext uri="{FF2B5EF4-FFF2-40B4-BE49-F238E27FC236}">
+                <a16:creationId xmlns:a16="http://schemas.microsoft.com/office/drawing/2014/main" id="{43C93512-C131-8897-BEA9-7B12DB86D29C}"/>
+              </a:ext>
+            </a:extLst>
+          </p:cNvPr>
+          <p:cNvPicPr>
+            <a:picLocks noChangeAspect="1"/>
+          </p:cNvPicPr>
+          <p:nvPr/>
+        </p:nvPicPr>
+        <p:blipFill>
+          <a:blip r:embed="rId3"/>
+          <a:stretch>
+            <a:fillRect/>
+          </a:stretch>
+        </p:blipFill>
+        <p:spPr>
+          <a:xfrm>
+            <a:off x="602166" y="1233370"/>
+            <a:ext cx="7939668" cy="3628611"/>
+          </a:xfrm>
+          <a:prstGeom prst="rect">
+            <a:avLst/>
+          </a:prstGeom>
+        </p:spPr>
+      </p:pic>
+    </p:spTree>
+    <p:extLst>
+      <p:ext uri="{BB962C8B-B14F-4D97-AF65-F5344CB8AC3E}">
+        <p14:creationId xmlns:p14="http://schemas.microsoft.com/office/powerpoint/2010/main" val="3527417754"/>
+      </p:ext>
+    </p:extLst>
+  </p:cSld>
+  <p:clrMapOvr>
+    <a:masterClrMapping/>
+  </p:clrMapOvr>
+</p:sld>
+</file>
+
+<file path=ppt/slides/slide6.xml><?xml version="1.0" encoding="utf-8"?>
+<p:sld xmlns:a="http://schemas.openxmlformats.org/drawingml/2006/main" xmlns:r="http://schemas.openxmlformats.org/officeDocument/2006/relationships" xmlns:p="http://schemas.openxmlformats.org/presentationml/2006/main">
+  <p:cSld>
+    <p:spTree>
+      <p:nvGrpSpPr>
+        <p:cNvPr id="1" name="Shape 61">
+          <a:extLst>
+            <a:ext uri="{FF2B5EF4-FFF2-40B4-BE49-F238E27FC236}">
+              <a16:creationId xmlns:a16="http://schemas.microsoft.com/office/drawing/2014/main" id="{72E719D4-D265-0059-631C-E6D1A088FF7B}"/>
+            </a:ext>
+          </a:extLst>
+        </p:cNvPr>
+        <p:cNvGrpSpPr/>
+        <p:nvPr/>
+      </p:nvGrpSpPr>
+      <p:grpSpPr>
+        <a:xfrm>
+          <a:off x="0" y="0"/>
+          <a:ext cx="0" cy="0"/>
+          <a:chOff x="0" y="0"/>
+          <a:chExt cx="0" cy="0"/>
+        </a:xfrm>
+      </p:grpSpPr>
+      <p:sp>
+        <p:nvSpPr>
+          <p:cNvPr id="62" name="Google Shape;62;p14">
+            <a:extLst>
+              <a:ext uri="{FF2B5EF4-FFF2-40B4-BE49-F238E27FC236}">
+                <a16:creationId xmlns:a16="http://schemas.microsoft.com/office/drawing/2014/main" id="{82C3B109-4325-DEB5-C9E3-4C4C7751D894}"/>
+              </a:ext>
+            </a:extLst>
+          </p:cNvPr>
+          <p:cNvSpPr txBox="1">
+            <a:spLocks noGrp="1"/>
+          </p:cNvSpPr>
+          <p:nvPr>
+            <p:ph type="title"/>
+          </p:nvPr>
+        </p:nvSpPr>
+        <p:spPr>
+          <a:xfrm>
+            <a:off x="311700" y="445025"/>
+            <a:ext cx="8520600" cy="572700"/>
+          </a:xfrm>
+          <a:prstGeom prst="rect">
+            <a:avLst/>
+          </a:prstGeom>
+        </p:spPr>
+        <p:txBody>
+          <a:bodyPr spcFirstLastPara="1" wrap="square" lIns="91425" tIns="91425" rIns="91425" bIns="91425" anchor="t" anchorCtr="0">
+            <a:noAutofit/>
+          </a:bodyPr>
+          <a:lstStyle/>
+          <a:p>
+            <a:pPr marL="0" lvl="0" indent="0" algn="l" rtl="0">
+              <a:spcBef>
+                <a:spcPts val="0"/>
+              </a:spcBef>
+              <a:spcAft>
+                <a:spcPts val="0"/>
+              </a:spcAft>
+              <a:buNone/>
+            </a:pPr>
+            <a:r>
+              <a:rPr lang="en" dirty="0"/>
+              <a:t>Lighthouse Report Habit Form</a:t>
+            </a:r>
+            <a:endParaRPr dirty="0"/>
+          </a:p>
+        </p:txBody>
+      </p:sp>
+      <p:pic>
+        <p:nvPicPr>
+          <p:cNvPr id="4" name="Picture 3">
+            <a:extLst>
+              <a:ext uri="{FF2B5EF4-FFF2-40B4-BE49-F238E27FC236}">
+                <a16:creationId xmlns:a16="http://schemas.microsoft.com/office/drawing/2014/main" id="{8486A6A9-A05F-DA7C-1BF5-A471A1D6F19C}"/>
+              </a:ext>
+            </a:extLst>
+          </p:cNvPr>
+          <p:cNvPicPr>
+            <a:picLocks noChangeAspect="1"/>
+          </p:cNvPicPr>
+          <p:nvPr/>
+        </p:nvPicPr>
+        <p:blipFill>
+          <a:blip r:embed="rId3"/>
+          <a:stretch>
+            <a:fillRect/>
+          </a:stretch>
+        </p:blipFill>
+        <p:spPr>
+          <a:xfrm>
+            <a:off x="764948" y="1220133"/>
+            <a:ext cx="7614103" cy="3478342"/>
+          </a:xfrm>
+          <a:prstGeom prst="rect">
+            <a:avLst/>
+          </a:prstGeom>
+        </p:spPr>
+      </p:pic>
+    </p:spTree>
+    <p:extLst>
+      <p:ext uri="{BB962C8B-B14F-4D97-AF65-F5344CB8AC3E}">
+        <p14:creationId xmlns:p14="http://schemas.microsoft.com/office/powerpoint/2010/main" val="2389851997"/>
+      </p:ext>
+    </p:extLst>
+  </p:cSld>
+  <p:clrMapOvr>
+    <a:masterClrMapping/>
+  </p:clrMapOvr>
+</p:sld>
+</file>
+
+<file path=ppt/slides/slide7.xml><?xml version="1.0" encoding="utf-8"?>
+<p:sld xmlns:a="http://schemas.openxmlformats.org/drawingml/2006/main" xmlns:r="http://schemas.openxmlformats.org/officeDocument/2006/relationships" xmlns:p="http://schemas.openxmlformats.org/presentationml/2006/main">
+  <p:cSld>
+    <p:spTree>
+      <p:nvGrpSpPr>
+        <p:cNvPr id="1" name="Shape 61">
+          <a:extLst>
+            <a:ext uri="{FF2B5EF4-FFF2-40B4-BE49-F238E27FC236}">
+              <a16:creationId xmlns:a16="http://schemas.microsoft.com/office/drawing/2014/main" id="{18FABDA2-833F-487E-6A25-79424392E89A}"/>
+            </a:ext>
+          </a:extLst>
+        </p:cNvPr>
+        <p:cNvGrpSpPr/>
+        <p:nvPr/>
+      </p:nvGrpSpPr>
+      <p:grpSpPr>
+        <a:xfrm>
+          <a:off x="0" y="0"/>
+          <a:ext cx="0" cy="0"/>
+          <a:chOff x="0" y="0"/>
+          <a:chExt cx="0" cy="0"/>
+        </a:xfrm>
+      </p:grpSpPr>
+      <p:sp>
+        <p:nvSpPr>
+          <p:cNvPr id="62" name="Google Shape;62;p14">
+            <a:extLst>
+              <a:ext uri="{FF2B5EF4-FFF2-40B4-BE49-F238E27FC236}">
+                <a16:creationId xmlns:a16="http://schemas.microsoft.com/office/drawing/2014/main" id="{1604FD59-3461-DB7C-1A69-AB4E676311B7}"/>
+              </a:ext>
+            </a:extLst>
+          </p:cNvPr>
+          <p:cNvSpPr txBox="1">
+            <a:spLocks noGrp="1"/>
+          </p:cNvSpPr>
+          <p:nvPr>
+            <p:ph type="title"/>
+          </p:nvPr>
+        </p:nvSpPr>
+        <p:spPr>
+          <a:xfrm>
+            <a:off x="311700" y="445025"/>
+            <a:ext cx="8520600" cy="572700"/>
+          </a:xfrm>
+          <a:prstGeom prst="rect">
+            <a:avLst/>
+          </a:prstGeom>
+        </p:spPr>
+        <p:txBody>
+          <a:bodyPr spcFirstLastPara="1" wrap="square" lIns="91425" tIns="91425" rIns="91425" bIns="91425" anchor="t" anchorCtr="0">
+            <a:noAutofit/>
+          </a:bodyPr>
+          <a:lstStyle/>
+          <a:p>
+            <a:pPr marL="0" lvl="0" indent="0" algn="l" rtl="0">
+              <a:spcBef>
+                <a:spcPts val="0"/>
+              </a:spcBef>
+              <a:spcAft>
+                <a:spcPts val="0"/>
+              </a:spcAft>
+              <a:buNone/>
+            </a:pPr>
+            <a:r>
+              <a:rPr lang="en" dirty="0"/>
+              <a:t>Lighthouse Report Login/Register</a:t>
+            </a:r>
+            <a:endParaRPr dirty="0"/>
+          </a:p>
+        </p:txBody>
+      </p:sp>
+      <p:pic>
+        <p:nvPicPr>
+          <p:cNvPr id="3" name="Picture 2">
+            <a:extLst>
+              <a:ext uri="{FF2B5EF4-FFF2-40B4-BE49-F238E27FC236}">
+                <a16:creationId xmlns:a16="http://schemas.microsoft.com/office/drawing/2014/main" id="{241C94FF-879B-BF77-07A6-06377120AD5F}"/>
+              </a:ext>
+            </a:extLst>
+          </p:cNvPr>
+          <p:cNvPicPr>
+            <a:picLocks noChangeAspect="1"/>
+          </p:cNvPicPr>
+          <p:nvPr/>
+        </p:nvPicPr>
+        <p:blipFill>
+          <a:blip r:embed="rId3"/>
+          <a:stretch>
+            <a:fillRect/>
+          </a:stretch>
+        </p:blipFill>
+        <p:spPr>
+          <a:xfrm>
+            <a:off x="676507" y="1143761"/>
+            <a:ext cx="7790985" cy="3554714"/>
+          </a:xfrm>
+          <a:prstGeom prst="rect">
+            <a:avLst/>
+          </a:prstGeom>
+        </p:spPr>
+      </p:pic>
+    </p:spTree>
+    <p:extLst>
+      <p:ext uri="{BB962C8B-B14F-4D97-AF65-F5344CB8AC3E}">
+        <p14:creationId xmlns:p14="http://schemas.microsoft.com/office/powerpoint/2010/main" val="3069239964"/>
+      </p:ext>
+    </p:extLst>
+  </p:cSld>
+  <p:clrMapOvr>
+    <a:masterClrMapping/>
+  </p:clrMapOvr>
+</p:sld>
+</file>
+
+<file path=ppt/slides/slide8.xml><?xml version="1.0" encoding="utf-8"?>
+<p:sld xmlns:a="http://schemas.openxmlformats.org/drawingml/2006/main" xmlns:r="http://schemas.openxmlformats.org/officeDocument/2006/relationships" xmlns:p="http://schemas.openxmlformats.org/presentationml/2006/main">
+  <p:cSld>
+    <p:spTree>
+      <p:nvGrpSpPr>
         <p:cNvPr id="1" name="Shape 67"/>
         <p:cNvGrpSpPr/>
         <p:nvPr/>
@@ -8148,7 +10144,7 @@
 </p:sld>
 </file>
 
-<file path=ppt/slides/slide4.xml><?xml version="1.0" encoding="utf-8"?>
+<file path=ppt/slides/slide9.xml><?xml version="1.0" encoding="utf-8"?>
 <p:sld xmlns:a="http://schemas.openxmlformats.org/drawingml/2006/main" xmlns:r="http://schemas.openxmlformats.org/officeDocument/2006/relationships" xmlns:p="http://schemas.openxmlformats.org/presentationml/2006/main">
   <p:cSld>
     <p:spTree>
@@ -8253,786 +10249,6 @@
     <p:extLst>
       <p:ext uri="{BB962C8B-B14F-4D97-AF65-F5344CB8AC3E}">
         <p14:creationId xmlns:p14="http://schemas.microsoft.com/office/powerpoint/2010/main" val="2289212932"/>
-      </p:ext>
-    </p:extLst>
-  </p:cSld>
-  <p:clrMapOvr>
-    <a:masterClrMapping/>
-  </p:clrMapOvr>
-</p:sld>
-</file>
-
-<file path=ppt/slides/slide5.xml><?xml version="1.0" encoding="utf-8"?>
-<p:sld xmlns:a="http://schemas.openxmlformats.org/drawingml/2006/main" xmlns:r="http://schemas.openxmlformats.org/officeDocument/2006/relationships" xmlns:p="http://schemas.openxmlformats.org/presentationml/2006/main">
-  <p:cSld>
-    <p:spTree>
-      <p:nvGrpSpPr>
-        <p:cNvPr id="1" name="Shape 67">
-          <a:extLst>
-            <a:ext uri="{FF2B5EF4-FFF2-40B4-BE49-F238E27FC236}">
-              <a16:creationId xmlns:a16="http://schemas.microsoft.com/office/drawing/2014/main" id="{A1C8D446-D947-292E-2B9D-1B0C196E8524}"/>
-            </a:ext>
-          </a:extLst>
-        </p:cNvPr>
-        <p:cNvGrpSpPr/>
-        <p:nvPr/>
-      </p:nvGrpSpPr>
-      <p:grpSpPr>
-        <a:xfrm>
-          <a:off x="0" y="0"/>
-          <a:ext cx="0" cy="0"/>
-          <a:chOff x="0" y="0"/>
-          <a:chExt cx="0" cy="0"/>
-        </a:xfrm>
-      </p:grpSpPr>
-      <p:sp>
-        <p:nvSpPr>
-          <p:cNvPr id="68" name="Google Shape;68;p15">
-            <a:extLst>
-              <a:ext uri="{FF2B5EF4-FFF2-40B4-BE49-F238E27FC236}">
-                <a16:creationId xmlns:a16="http://schemas.microsoft.com/office/drawing/2014/main" id="{4E0D2F87-FD5F-4313-71FB-B75C20002AC3}"/>
-              </a:ext>
-            </a:extLst>
-          </p:cNvPr>
-          <p:cNvSpPr txBox="1">
-            <a:spLocks noGrp="1"/>
-          </p:cNvSpPr>
-          <p:nvPr>
-            <p:ph type="title"/>
-          </p:nvPr>
-        </p:nvSpPr>
-        <p:spPr>
-          <a:xfrm>
-            <a:off x="311700" y="445025"/>
-            <a:ext cx="8520600" cy="572700"/>
-          </a:xfrm>
-          <a:prstGeom prst="rect">
-            <a:avLst/>
-          </a:prstGeom>
-        </p:spPr>
-        <p:txBody>
-          <a:bodyPr spcFirstLastPara="1" wrap="square" lIns="91425" tIns="91425" rIns="91425" bIns="91425" anchor="t" anchorCtr="0">
-            <a:noAutofit/>
-          </a:bodyPr>
-          <a:lstStyle/>
-          <a:p>
-            <a:pPr marL="0" lvl="0" indent="0" algn="l" rtl="0">
-              <a:spcBef>
-                <a:spcPts val="0"/>
-              </a:spcBef>
-              <a:spcAft>
-                <a:spcPts val="0"/>
-              </a:spcAft>
-              <a:buNone/>
-            </a:pPr>
-            <a:r>
-              <a:rPr lang="en"/>
-              <a:t>Design and Mockups</a:t>
-            </a:r>
-            <a:endParaRPr/>
-          </a:p>
-        </p:txBody>
-      </p:sp>
-      <p:pic>
-        <p:nvPicPr>
-          <p:cNvPr id="4" name="Picture 3">
-            <a:extLst>
-              <a:ext uri="{FF2B5EF4-FFF2-40B4-BE49-F238E27FC236}">
-                <a16:creationId xmlns:a16="http://schemas.microsoft.com/office/drawing/2014/main" id="{C92473CF-BA37-5252-16CF-6FDA569C46CB}"/>
-              </a:ext>
-            </a:extLst>
-          </p:cNvPr>
-          <p:cNvPicPr>
-            <a:picLocks noChangeAspect="1"/>
-          </p:cNvPicPr>
-          <p:nvPr/>
-        </p:nvPicPr>
-        <p:blipFill>
-          <a:blip r:embed="rId3"/>
-          <a:stretch>
-            <a:fillRect/>
-          </a:stretch>
-        </p:blipFill>
-        <p:spPr>
-          <a:xfrm>
-            <a:off x="1995128" y="1017725"/>
-            <a:ext cx="5153744" cy="3334215"/>
-          </a:xfrm>
-          <a:prstGeom prst="rect">
-            <a:avLst/>
-          </a:prstGeom>
-        </p:spPr>
-      </p:pic>
-    </p:spTree>
-    <p:extLst>
-      <p:ext uri="{BB962C8B-B14F-4D97-AF65-F5344CB8AC3E}">
-        <p14:creationId xmlns:p14="http://schemas.microsoft.com/office/powerpoint/2010/main" val="3020420484"/>
-      </p:ext>
-    </p:extLst>
-  </p:cSld>
-  <p:clrMapOvr>
-    <a:masterClrMapping/>
-  </p:clrMapOvr>
-</p:sld>
-</file>
-
-<file path=ppt/slides/slide6.xml><?xml version="1.0" encoding="utf-8"?>
-<p:sld xmlns:a="http://schemas.openxmlformats.org/drawingml/2006/main" xmlns:r="http://schemas.openxmlformats.org/officeDocument/2006/relationships" xmlns:p="http://schemas.openxmlformats.org/presentationml/2006/main">
-  <p:cSld>
-    <p:spTree>
-      <p:nvGrpSpPr>
-        <p:cNvPr id="1" name="Shape 67">
-          <a:extLst>
-            <a:ext uri="{FF2B5EF4-FFF2-40B4-BE49-F238E27FC236}">
-              <a16:creationId xmlns:a16="http://schemas.microsoft.com/office/drawing/2014/main" id="{12F27822-F032-6FE9-0125-303E65B25BB8}"/>
-            </a:ext>
-          </a:extLst>
-        </p:cNvPr>
-        <p:cNvGrpSpPr/>
-        <p:nvPr/>
-      </p:nvGrpSpPr>
-      <p:grpSpPr>
-        <a:xfrm>
-          <a:off x="0" y="0"/>
-          <a:ext cx="0" cy="0"/>
-          <a:chOff x="0" y="0"/>
-          <a:chExt cx="0" cy="0"/>
-        </a:xfrm>
-      </p:grpSpPr>
-      <p:sp>
-        <p:nvSpPr>
-          <p:cNvPr id="68" name="Google Shape;68;p15">
-            <a:extLst>
-              <a:ext uri="{FF2B5EF4-FFF2-40B4-BE49-F238E27FC236}">
-                <a16:creationId xmlns:a16="http://schemas.microsoft.com/office/drawing/2014/main" id="{850F9874-8CF1-4E49-14C2-8B37FF88640E}"/>
-              </a:ext>
-            </a:extLst>
-          </p:cNvPr>
-          <p:cNvSpPr txBox="1">
-            <a:spLocks noGrp="1"/>
-          </p:cNvSpPr>
-          <p:nvPr>
-            <p:ph type="title"/>
-          </p:nvPr>
-        </p:nvSpPr>
-        <p:spPr>
-          <a:xfrm>
-            <a:off x="311700" y="445025"/>
-            <a:ext cx="8520600" cy="572700"/>
-          </a:xfrm>
-          <a:prstGeom prst="rect">
-            <a:avLst/>
-          </a:prstGeom>
-        </p:spPr>
-        <p:txBody>
-          <a:bodyPr spcFirstLastPara="1" wrap="square" lIns="91425" tIns="91425" rIns="91425" bIns="91425" anchor="t" anchorCtr="0">
-            <a:noAutofit/>
-          </a:bodyPr>
-          <a:lstStyle/>
-          <a:p>
-            <a:pPr marL="0" lvl="0" indent="0" algn="l" rtl="0">
-              <a:spcBef>
-                <a:spcPts val="0"/>
-              </a:spcBef>
-              <a:spcAft>
-                <a:spcPts val="0"/>
-              </a:spcAft>
-              <a:buNone/>
-            </a:pPr>
-            <a:r>
-              <a:rPr lang="en"/>
-              <a:t>Design and Mockups</a:t>
-            </a:r>
-            <a:endParaRPr/>
-          </a:p>
-        </p:txBody>
-      </p:sp>
-      <p:pic>
-        <p:nvPicPr>
-          <p:cNvPr id="3" name="Picture 2">
-            <a:extLst>
-              <a:ext uri="{FF2B5EF4-FFF2-40B4-BE49-F238E27FC236}">
-                <a16:creationId xmlns:a16="http://schemas.microsoft.com/office/drawing/2014/main" id="{9CAEB2C9-4CD8-DD67-63FB-70CA07BBC660}"/>
-              </a:ext>
-            </a:extLst>
-          </p:cNvPr>
-          <p:cNvPicPr>
-            <a:picLocks noChangeAspect="1"/>
-          </p:cNvPicPr>
-          <p:nvPr/>
-        </p:nvPicPr>
-        <p:blipFill>
-          <a:blip r:embed="rId3"/>
-          <a:stretch>
-            <a:fillRect/>
-          </a:stretch>
-        </p:blipFill>
-        <p:spPr>
-          <a:xfrm>
-            <a:off x="1353312" y="1017725"/>
-            <a:ext cx="6212095" cy="4120541"/>
-          </a:xfrm>
-          <a:prstGeom prst="rect">
-            <a:avLst/>
-          </a:prstGeom>
-        </p:spPr>
-      </p:pic>
-    </p:spTree>
-    <p:extLst>
-      <p:ext uri="{BB962C8B-B14F-4D97-AF65-F5344CB8AC3E}">
-        <p14:creationId xmlns:p14="http://schemas.microsoft.com/office/powerpoint/2010/main" val="972308140"/>
-      </p:ext>
-    </p:extLst>
-  </p:cSld>
-  <p:clrMapOvr>
-    <a:masterClrMapping/>
-  </p:clrMapOvr>
-</p:sld>
-</file>
-
-<file path=ppt/slides/slide7.xml><?xml version="1.0" encoding="utf-8"?>
-<p:sld xmlns:a="http://schemas.openxmlformats.org/drawingml/2006/main" xmlns:r="http://schemas.openxmlformats.org/officeDocument/2006/relationships" xmlns:p="http://schemas.openxmlformats.org/presentationml/2006/main">
-  <p:cSld>
-    <p:spTree>
-      <p:nvGrpSpPr>
-        <p:cNvPr id="1" name="Shape 67">
-          <a:extLst>
-            <a:ext uri="{FF2B5EF4-FFF2-40B4-BE49-F238E27FC236}">
-              <a16:creationId xmlns:a16="http://schemas.microsoft.com/office/drawing/2014/main" id="{474248D7-F55E-A56D-A86A-50284499EA1C}"/>
-            </a:ext>
-          </a:extLst>
-        </p:cNvPr>
-        <p:cNvGrpSpPr/>
-        <p:nvPr/>
-      </p:nvGrpSpPr>
-      <p:grpSpPr>
-        <a:xfrm>
-          <a:off x="0" y="0"/>
-          <a:ext cx="0" cy="0"/>
-          <a:chOff x="0" y="0"/>
-          <a:chExt cx="0" cy="0"/>
-        </a:xfrm>
-      </p:grpSpPr>
-      <p:sp>
-        <p:nvSpPr>
-          <p:cNvPr id="68" name="Google Shape;68;p15">
-            <a:extLst>
-              <a:ext uri="{FF2B5EF4-FFF2-40B4-BE49-F238E27FC236}">
-                <a16:creationId xmlns:a16="http://schemas.microsoft.com/office/drawing/2014/main" id="{C11A44D4-504A-DF73-0760-AAE71BBD86CC}"/>
-              </a:ext>
-            </a:extLst>
-          </p:cNvPr>
-          <p:cNvSpPr txBox="1">
-            <a:spLocks noGrp="1"/>
-          </p:cNvSpPr>
-          <p:nvPr>
-            <p:ph type="title"/>
-          </p:nvPr>
-        </p:nvSpPr>
-        <p:spPr>
-          <a:xfrm>
-            <a:off x="311700" y="445025"/>
-            <a:ext cx="8520600" cy="572700"/>
-          </a:xfrm>
-          <a:prstGeom prst="rect">
-            <a:avLst/>
-          </a:prstGeom>
-        </p:spPr>
-        <p:txBody>
-          <a:bodyPr spcFirstLastPara="1" wrap="square" lIns="91425" tIns="91425" rIns="91425" bIns="91425" anchor="t" anchorCtr="0">
-            <a:noAutofit/>
-          </a:bodyPr>
-          <a:lstStyle/>
-          <a:p>
-            <a:pPr marL="0" lvl="0" indent="0" algn="l" rtl="0">
-              <a:spcBef>
-                <a:spcPts val="0"/>
-              </a:spcBef>
-              <a:spcAft>
-                <a:spcPts val="0"/>
-              </a:spcAft>
-              <a:buNone/>
-            </a:pPr>
-            <a:r>
-              <a:rPr lang="en"/>
-              <a:t>Design and Mockups</a:t>
-            </a:r>
-            <a:endParaRPr/>
-          </a:p>
-        </p:txBody>
-      </p:sp>
-      <p:pic>
-        <p:nvPicPr>
-          <p:cNvPr id="4" name="Picture 3">
-            <a:extLst>
-              <a:ext uri="{FF2B5EF4-FFF2-40B4-BE49-F238E27FC236}">
-                <a16:creationId xmlns:a16="http://schemas.microsoft.com/office/drawing/2014/main" id="{BE8FF8E8-DCC8-1E7F-1025-9D230C8CD790}"/>
-              </a:ext>
-            </a:extLst>
-          </p:cNvPr>
-          <p:cNvPicPr>
-            <a:picLocks noChangeAspect="1"/>
-          </p:cNvPicPr>
-          <p:nvPr/>
-        </p:nvPicPr>
-        <p:blipFill>
-          <a:blip r:embed="rId3"/>
-          <a:stretch>
-            <a:fillRect/>
-          </a:stretch>
-        </p:blipFill>
-        <p:spPr>
-          <a:xfrm>
-            <a:off x="1634455" y="1017725"/>
-            <a:ext cx="5875089" cy="3890730"/>
-          </a:xfrm>
-          <a:prstGeom prst="rect">
-            <a:avLst/>
-          </a:prstGeom>
-        </p:spPr>
-      </p:pic>
-    </p:spTree>
-    <p:extLst>
-      <p:ext uri="{BB962C8B-B14F-4D97-AF65-F5344CB8AC3E}">
-        <p14:creationId xmlns:p14="http://schemas.microsoft.com/office/powerpoint/2010/main" val="2845261414"/>
-      </p:ext>
-    </p:extLst>
-  </p:cSld>
-  <p:clrMapOvr>
-    <a:masterClrMapping/>
-  </p:clrMapOvr>
-</p:sld>
-</file>
-
-<file path=ppt/slides/slide8.xml><?xml version="1.0" encoding="utf-8"?>
-<p:sld xmlns:a="http://schemas.openxmlformats.org/drawingml/2006/main" xmlns:r="http://schemas.openxmlformats.org/officeDocument/2006/relationships" xmlns:p="http://schemas.openxmlformats.org/presentationml/2006/main">
-  <p:cSld>
-    <p:spTree>
-      <p:nvGrpSpPr>
-        <p:cNvPr id="1" name="Shape 72"/>
-        <p:cNvGrpSpPr/>
-        <p:nvPr/>
-      </p:nvGrpSpPr>
-      <p:grpSpPr>
-        <a:xfrm>
-          <a:off x="0" y="0"/>
-          <a:ext cx="0" cy="0"/>
-          <a:chOff x="0" y="0"/>
-          <a:chExt cx="0" cy="0"/>
-        </a:xfrm>
-      </p:grpSpPr>
-      <p:sp>
-        <p:nvSpPr>
-          <p:cNvPr id="73" name="Google Shape;73;p16"/>
-          <p:cNvSpPr txBox="1">
-            <a:spLocks noGrp="1"/>
-          </p:cNvSpPr>
-          <p:nvPr>
-            <p:ph type="title"/>
-          </p:nvPr>
-        </p:nvSpPr>
-        <p:spPr>
-          <a:xfrm>
-            <a:off x="311700" y="445025"/>
-            <a:ext cx="8520600" cy="572700"/>
-          </a:xfrm>
-          <a:prstGeom prst="rect">
-            <a:avLst/>
-          </a:prstGeom>
-        </p:spPr>
-        <p:txBody>
-          <a:bodyPr spcFirstLastPara="1" wrap="square" lIns="91425" tIns="91425" rIns="91425" bIns="91425" anchor="t" anchorCtr="0">
-            <a:noAutofit/>
-          </a:bodyPr>
-          <a:lstStyle/>
-          <a:p>
-            <a:pPr marL="0" lvl="0" indent="0" algn="l" rtl="0">
-              <a:spcBef>
-                <a:spcPts val="0"/>
-              </a:spcBef>
-              <a:spcAft>
-                <a:spcPts val="0"/>
-              </a:spcAft>
-              <a:buNone/>
-            </a:pPr>
-            <a:r>
-              <a:rPr lang="en"/>
-              <a:t>Technologies used</a:t>
-            </a:r>
-            <a:endParaRPr/>
-          </a:p>
-        </p:txBody>
-      </p:sp>
-      <p:sp>
-        <p:nvSpPr>
-          <p:cNvPr id="74" name="Google Shape;74;p16"/>
-          <p:cNvSpPr txBox="1">
-            <a:spLocks noGrp="1"/>
-          </p:cNvSpPr>
-          <p:nvPr>
-            <p:ph type="body" idx="1"/>
-          </p:nvPr>
-        </p:nvSpPr>
-        <p:spPr>
-          <a:xfrm>
-            <a:off x="311700" y="1152475"/>
-            <a:ext cx="8520600" cy="3416400"/>
-          </a:xfrm>
-          <a:prstGeom prst="rect">
-            <a:avLst/>
-          </a:prstGeom>
-        </p:spPr>
-        <p:txBody>
-          <a:bodyPr spcFirstLastPara="1" wrap="square" lIns="91425" tIns="91425" rIns="91425" bIns="91425" anchor="t" anchorCtr="0">
-            <a:noAutofit/>
-          </a:bodyPr>
-          <a:lstStyle/>
-          <a:p>
-            <a:pPr marL="0" lvl="0" indent="0" algn="l" rtl="0">
-              <a:spcBef>
-                <a:spcPts val="0"/>
-              </a:spcBef>
-              <a:spcAft>
-                <a:spcPts val="1600"/>
-              </a:spcAft>
-              <a:buNone/>
-            </a:pPr>
-            <a:r>
-              <a:rPr lang="en-IN" dirty="0"/>
-              <a:t>Node.js + Express (REST API backend)</a:t>
-            </a:r>
-          </a:p>
-          <a:p>
-            <a:pPr marL="0" lvl="0" indent="0" algn="l" rtl="0">
-              <a:spcBef>
-                <a:spcPts val="0"/>
-              </a:spcBef>
-              <a:spcAft>
-                <a:spcPts val="1600"/>
-              </a:spcAft>
-              <a:buNone/>
-            </a:pPr>
-            <a:r>
-              <a:rPr lang="en-IN" dirty="0"/>
-              <a:t>MongoDB native driver (3 collections: habits, logs, goals)</a:t>
-            </a:r>
-          </a:p>
-          <a:p>
-            <a:pPr marL="0" lvl="0" indent="0" algn="l" rtl="0">
-              <a:spcBef>
-                <a:spcPts val="0"/>
-              </a:spcBef>
-              <a:spcAft>
-                <a:spcPts val="1600"/>
-              </a:spcAft>
-              <a:buNone/>
-            </a:pPr>
-            <a:r>
-              <a:rPr lang="en-IN" dirty="0"/>
-              <a:t>React 18 with </a:t>
-            </a:r>
-            <a:r>
-              <a:rPr lang="en-IN" dirty="0" err="1"/>
-              <a:t>Hools</a:t>
-            </a:r>
-            <a:r>
-              <a:rPr lang="en-IN" dirty="0"/>
-              <a:t> + React Router v6 (client-side rendering)</a:t>
-            </a:r>
-          </a:p>
-          <a:p>
-            <a:pPr marL="0" lvl="0" indent="0" algn="l" rtl="0">
-              <a:spcBef>
-                <a:spcPts val="0"/>
-              </a:spcBef>
-              <a:spcAft>
-                <a:spcPts val="1600"/>
-              </a:spcAft>
-              <a:buNone/>
-            </a:pPr>
-            <a:r>
-              <a:rPr lang="en-IN" dirty="0" err="1"/>
-              <a:t>ESLint</a:t>
-            </a:r>
-            <a:r>
-              <a:rPr lang="en-IN" dirty="0"/>
-              <a:t> + Prettier + Vite (build tool) + </a:t>
-            </a:r>
-            <a:r>
-              <a:rPr lang="en-IN" dirty="0" err="1"/>
-              <a:t>PropTypes</a:t>
-            </a:r>
-            <a:endParaRPr lang="en-IN" dirty="0"/>
-          </a:p>
-          <a:p>
-            <a:pPr marL="0" lvl="0" indent="0" algn="l" rtl="0">
-              <a:spcBef>
-                <a:spcPts val="0"/>
-              </a:spcBef>
-              <a:spcAft>
-                <a:spcPts val="1600"/>
-              </a:spcAft>
-              <a:buNone/>
-            </a:pPr>
-            <a:r>
-              <a:rPr lang="en-IN" dirty="0"/>
-              <a:t>Deployed on Render (backend Web Service + frontend Static Site)</a:t>
-            </a:r>
-          </a:p>
-          <a:p>
-            <a:pPr marL="0" lvl="0" indent="0" algn="l" rtl="0">
-              <a:spcBef>
-                <a:spcPts val="0"/>
-              </a:spcBef>
-              <a:spcAft>
-                <a:spcPts val="1600"/>
-              </a:spcAft>
-              <a:buNone/>
-            </a:pPr>
-            <a:r>
-              <a:rPr lang="en-IN" dirty="0"/>
-              <a:t>Passport.js + </a:t>
-            </a:r>
-            <a:r>
-              <a:rPr lang="en-IN" dirty="0" err="1"/>
-              <a:t>bcrypt</a:t>
-            </a:r>
-            <a:r>
-              <a:rPr lang="en-IN" dirty="0"/>
-              <a:t> + express-session (authentication)</a:t>
-            </a:r>
-          </a:p>
-          <a:p>
-            <a:pPr marL="0" lvl="0" indent="0" algn="l" rtl="0">
-              <a:spcBef>
-                <a:spcPts val="0"/>
-              </a:spcBef>
-              <a:spcAft>
-                <a:spcPts val="1600"/>
-              </a:spcAft>
-              <a:buNone/>
-            </a:pPr>
-            <a:r>
-              <a:rPr lang="en-IN" dirty="0"/>
-              <a:t>Syne + DM Sans (typography pairing)</a:t>
-            </a:r>
-            <a:endParaRPr dirty="0"/>
-          </a:p>
-        </p:txBody>
-      </p:sp>
-    </p:spTree>
-  </p:cSld>
-  <p:clrMapOvr>
-    <a:masterClrMapping/>
-  </p:clrMapOvr>
-</p:sld>
-</file>
-
-<file path=ppt/slides/slide9.xml><?xml version="1.0" encoding="utf-8"?>
-<p:sld xmlns:a="http://schemas.openxmlformats.org/drawingml/2006/main" xmlns:r="http://schemas.openxmlformats.org/officeDocument/2006/relationships" xmlns:p="http://schemas.openxmlformats.org/presentationml/2006/main">
-  <p:cSld>
-    <p:spTree>
-      <p:nvGrpSpPr>
-        <p:cNvPr id="1" name="Shape 72">
-          <a:extLst>
-            <a:ext uri="{FF2B5EF4-FFF2-40B4-BE49-F238E27FC236}">
-              <a16:creationId xmlns:a16="http://schemas.microsoft.com/office/drawing/2014/main" id="{3483CE52-5F58-2B5C-1F57-63F356C8C09D}"/>
-            </a:ext>
-          </a:extLst>
-        </p:cNvPr>
-        <p:cNvGrpSpPr/>
-        <p:nvPr/>
-      </p:nvGrpSpPr>
-      <p:grpSpPr>
-        <a:xfrm>
-          <a:off x="0" y="0"/>
-          <a:ext cx="0" cy="0"/>
-          <a:chOff x="0" y="0"/>
-          <a:chExt cx="0" cy="0"/>
-        </a:xfrm>
-      </p:grpSpPr>
-      <p:sp>
-        <p:nvSpPr>
-          <p:cNvPr id="73" name="Google Shape;73;p16">
-            <a:extLst>
-              <a:ext uri="{FF2B5EF4-FFF2-40B4-BE49-F238E27FC236}">
-                <a16:creationId xmlns:a16="http://schemas.microsoft.com/office/drawing/2014/main" id="{0AA5E858-CD0C-6F3C-99DE-7C2DA183AFA4}"/>
-              </a:ext>
-            </a:extLst>
-          </p:cNvPr>
-          <p:cNvSpPr txBox="1">
-            <a:spLocks noGrp="1"/>
-          </p:cNvSpPr>
-          <p:nvPr>
-            <p:ph type="title"/>
-          </p:nvPr>
-        </p:nvSpPr>
-        <p:spPr>
-          <a:xfrm>
-            <a:off x="311700" y="445025"/>
-            <a:ext cx="8520600" cy="572700"/>
-          </a:xfrm>
-          <a:prstGeom prst="rect">
-            <a:avLst/>
-          </a:prstGeom>
-        </p:spPr>
-        <p:txBody>
-          <a:bodyPr spcFirstLastPara="1" wrap="square" lIns="91425" tIns="91425" rIns="91425" bIns="91425" anchor="t" anchorCtr="0">
-            <a:noAutofit/>
-          </a:bodyPr>
-          <a:lstStyle/>
-          <a:p>
-            <a:pPr marL="0" lvl="0" indent="0" algn="l" rtl="0">
-              <a:spcBef>
-                <a:spcPts val="0"/>
-              </a:spcBef>
-              <a:spcAft>
-                <a:spcPts val="0"/>
-              </a:spcAft>
-              <a:buNone/>
-            </a:pPr>
-            <a:r>
-              <a:rPr lang="en-US" dirty="0"/>
-              <a:t>What Makes This Project Different?</a:t>
-            </a:r>
-            <a:endParaRPr dirty="0"/>
-          </a:p>
-        </p:txBody>
-      </p:sp>
-      <p:sp>
-        <p:nvSpPr>
-          <p:cNvPr id="74" name="Google Shape;74;p16">
-            <a:extLst>
-              <a:ext uri="{FF2B5EF4-FFF2-40B4-BE49-F238E27FC236}">
-                <a16:creationId xmlns:a16="http://schemas.microsoft.com/office/drawing/2014/main" id="{85CC995F-BB81-4BC6-9A27-DF1F2A5FFEE0}"/>
-              </a:ext>
-            </a:extLst>
-          </p:cNvPr>
-          <p:cNvSpPr txBox="1">
-            <a:spLocks noGrp="1"/>
-          </p:cNvSpPr>
-          <p:nvPr>
-            <p:ph type="body" idx="1"/>
-          </p:nvPr>
-        </p:nvSpPr>
-        <p:spPr>
-          <a:xfrm>
-            <a:off x="311700" y="1152475"/>
-            <a:ext cx="8520600" cy="3416400"/>
-          </a:xfrm>
-          <a:prstGeom prst="rect">
-            <a:avLst/>
-          </a:prstGeom>
-        </p:spPr>
-        <p:txBody>
-          <a:bodyPr spcFirstLastPara="1" wrap="square" lIns="91425" tIns="91425" rIns="91425" bIns="91425" anchor="t" anchorCtr="0">
-            <a:noAutofit/>
-          </a:bodyPr>
-          <a:lstStyle/>
-          <a:p>
-            <a:pPr marL="0" lvl="0" indent="0" algn="l" rtl="0">
-              <a:spcBef>
-                <a:spcPts val="0"/>
-              </a:spcBef>
-              <a:spcAft>
-                <a:spcPts val="1600"/>
-              </a:spcAft>
-              <a:buNone/>
-            </a:pPr>
-            <a:r>
-              <a:rPr lang="en-US" dirty="0"/>
-              <a:t>Full analytics engine with streak calculation, weekly completion %, and date range filtering</a:t>
-            </a:r>
-          </a:p>
-          <a:p>
-            <a:pPr marL="0" lvl="0" indent="0" algn="l" rtl="0">
-              <a:spcBef>
-                <a:spcPts val="0"/>
-              </a:spcBef>
-              <a:spcAft>
-                <a:spcPts val="1600"/>
-              </a:spcAft>
-              <a:buNone/>
-            </a:pPr>
-            <a:r>
-              <a:rPr lang="en-US" dirty="0"/>
-              <a:t>3 MongoDB collections with full CRUD split between both team members</a:t>
-            </a:r>
-          </a:p>
-          <a:p>
-            <a:pPr marL="0" lvl="0" indent="0" algn="l" rtl="0">
-              <a:spcBef>
-                <a:spcPts val="0"/>
-              </a:spcBef>
-              <a:spcAft>
-                <a:spcPts val="1600"/>
-              </a:spcAft>
-              <a:buNone/>
-            </a:pPr>
-            <a:r>
-              <a:rPr lang="en-US" dirty="0"/>
-              <a:t>2046 synthetic records with realistic streak patterns, duplicate prevention and batch seeding</a:t>
-            </a:r>
-          </a:p>
-          <a:p>
-            <a:pPr marL="0" lvl="0" indent="0" algn="l" rtl="0">
-              <a:spcBef>
-                <a:spcPts val="0"/>
-              </a:spcBef>
-              <a:spcAft>
-                <a:spcPts val="1600"/>
-              </a:spcAft>
-              <a:buNone/>
-            </a:pPr>
-            <a:r>
-              <a:rPr lang="en-US" dirty="0"/>
-              <a:t>100% Lighthouse accessibility score across all pages</a:t>
-            </a:r>
-          </a:p>
-          <a:p>
-            <a:pPr marL="0" lvl="0" indent="0" algn="l" rtl="0">
-              <a:spcBef>
-                <a:spcPts val="0"/>
-              </a:spcBef>
-              <a:spcAft>
-                <a:spcPts val="1600"/>
-              </a:spcAft>
-              <a:buNone/>
-            </a:pPr>
-            <a:r>
-              <a:rPr lang="en-US" dirty="0"/>
-              <a:t>Full keyboard navigation with skip-to-content link and Escape key modal support</a:t>
-            </a:r>
-          </a:p>
-          <a:p>
-            <a:pPr marL="0" lvl="0" indent="0" algn="l" rtl="0">
-              <a:spcBef>
-                <a:spcPts val="0"/>
-              </a:spcBef>
-              <a:spcAft>
-                <a:spcPts val="1600"/>
-              </a:spcAft>
-              <a:buNone/>
-            </a:pPr>
-            <a:r>
-              <a:rPr lang="en-US" dirty="0"/>
-              <a:t>Usability study with 6 participants informed analytics filter improvements, google </a:t>
-            </a:r>
-            <a:r>
-              <a:rPr lang="en-US" dirty="0" err="1"/>
-              <a:t>sso</a:t>
-            </a:r>
-            <a:r>
-              <a:rPr lang="en-US" dirty="0"/>
-              <a:t>, and quick-fill log notes</a:t>
-            </a:r>
-          </a:p>
-        </p:txBody>
-      </p:sp>
-    </p:spTree>
-    <p:extLst>
-      <p:ext uri="{BB962C8B-B14F-4D97-AF65-F5344CB8AC3E}">
-        <p14:creationId xmlns:p14="http://schemas.microsoft.com/office/powerpoint/2010/main" val="490821702"/>
       </p:ext>
     </p:extLst>
   </p:cSld>
